--- a/presentation/TimeSorter_발표자료.pptx
+++ b/presentation/TimeSorter_발표자료.pptx
@@ -3518,14 +3518,14 @@
                 </a:solidFill>
                 <a:latin typeface="Noto Sans CJK KR"/>
               </a:rPr>
-              <a:t>벤치마크 — 전체 학습 커브</a:t>
+              <a:t>벤치마크 — 학습 여정의 두 점프</a:t>
             </a:r>
           </a:p>
         </p:txBody>
       </p:sp>
       <p:pic>
         <p:nvPicPr>
-          <p:cNvPr id="6" name="Picture 5" descr="chart_learning_curve.png"/>
+          <p:cNvPr id="6" name="Picture 5" descr="chart_milestones.png"/>
           <p:cNvPicPr>
             <a:picLocks noChangeAspect="1"/>
           </p:cNvPicPr>
@@ -3539,8 +3539,8 @@
         </p:blipFill>
         <p:spPr>
           <a:xfrm>
-            <a:off x="1468967" y="1325880"/>
-            <a:ext cx="9269306" cy="4206240"/>
+            <a:off x="2325915" y="1325880"/>
+            <a:ext cx="7509689" cy="4297680"/>
           </a:xfrm>
           <a:prstGeom prst="rect">
             <a:avLst/>
@@ -3555,8 +3555,8 @@
         </p:nvSpPr>
         <p:spPr>
           <a:xfrm>
-            <a:off x="457200" y="5669280"/>
-            <a:ext cx="11247120" cy="914400"/>
+            <a:off x="457200" y="5806440"/>
+            <a:ext cx="11247120" cy="640080"/>
           </a:xfrm>
           <a:prstGeom prst="rect">
             <a:avLst/>
@@ -3577,23 +3577,7 @@
                 </a:solidFill>
                 <a:latin typeface="Noto Sans CJK KR"/>
               </a:rPr>
-              <a:t>DPO v3(56.7%) → SFT v4(77.3%, +20.6%p) → Qwen3.5 업그레이드(90.0%, +12.7%p)</a:t>
-            </a:r>
-          </a:p>
-          <a:p>
-            <a:pPr algn="ctr">
-              <a:spcBef>
-                <a:spcPts val="200"/>
-              </a:spcBef>
-            </a:pPr>
-            <a:r>
-              <a:rPr sz="1100" b="0" i="1">
-                <a:solidFill>
-                  <a:srgbClr val="5A5A5A"/>
-                </a:solidFill>
-                <a:latin typeface="Noto Sans CJK KR"/>
-              </a:rPr>
-              <a:t>골격 규칙 기반 자동 채점 (held-out, 무처리 통과율)</a:t>
+              <a:t>성능 점프는 모델 구조가 아니라 데이터 큐레이션(+20.6%p)과 모델 업그레이드(+12.7%p)에서</a:t>
             </a:r>
           </a:p>
         </p:txBody>
@@ -3804,14 +3788,14 @@
                 </a:solidFill>
                 <a:latin typeface="Noto Sans CJK KR"/>
               </a:rPr>
-              <a:t>Qwen3.5-4B — Base / Instruct / SFT / DPO</a:t>
+              <a:t>Qwen3.5-4B 파인튜닝 단계별 통과율</a:t>
             </a:r>
           </a:p>
         </p:txBody>
       </p:sp>
       <p:pic>
         <p:nvPicPr>
-          <p:cNvPr id="6" name="Picture 5" descr="chart_qwen35_comparison.png"/>
+          <p:cNvPr id="6" name="Picture 5" descr="chart_progression.png"/>
           <p:cNvPicPr>
             <a:picLocks noChangeAspect="1"/>
           </p:cNvPicPr>
@@ -3825,8 +3809,8 @@
         </p:blipFill>
         <p:spPr>
           <a:xfrm>
-            <a:off x="1004409" y="1325880"/>
-            <a:ext cx="10198421" cy="4297680"/>
+            <a:off x="2330824" y="1325880"/>
+            <a:ext cx="7499872" cy="4297680"/>
           </a:xfrm>
           <a:prstGeom prst="rect">
             <a:avLst/>
@@ -3841,7 +3825,7 @@
         </p:nvSpPr>
         <p:spPr>
           <a:xfrm>
-            <a:off x="457200" y="5760720"/>
+            <a:off x="457200" y="5806440"/>
             <a:ext cx="11247120" cy="548640"/>
           </a:xfrm>
           <a:prstGeom prst="rect">
@@ -3857,13 +3841,13 @@
           <a:p>
             <a:pPr algn="ctr"/>
             <a:r>
-              <a:rPr sz="1200" b="0" i="1">
+              <a:rPr sz="1300" b="0" i="1">
                 <a:solidFill>
                   <a:srgbClr val="5A5A5A"/>
                 </a:solidFill>
                 <a:latin typeface="Noto Sans CJK KR"/>
               </a:rPr>
-              <a:t>좌: 전체 통과율 · 우: 시나리오별 처리능력 (n=30 held-out)</a:t>
+              <a:t>어댑터 없음 0% → Base 16.7% → SFT 90% → DPO 90% (held-out n=30)</a:t>
             </a:r>
           </a:p>
         </p:txBody>
@@ -4074,14 +4058,14 @@
                 </a:solidFill>
                 <a:latin typeface="Noto Sans CJK KR"/>
               </a:rPr>
-              <a:t>시나리오별 통과율 히트맵</a:t>
+              <a:t>시나리오별 통과율 — SFT vs DPO</a:t>
             </a:r>
           </a:p>
         </p:txBody>
       </p:sp>
       <p:pic>
         <p:nvPicPr>
-          <p:cNvPr id="6" name="Picture 5" descr="chart_scenario_heatmap.png"/>
+          <p:cNvPr id="6" name="Picture 5" descr="chart_scenario.png"/>
           <p:cNvPicPr>
             <a:picLocks noChangeAspect="1"/>
           </p:cNvPicPr>
@@ -4095,8 +4079,8 @@
         </p:blipFill>
         <p:spPr>
           <a:xfrm>
-            <a:off x="2629724" y="1325880"/>
-            <a:ext cx="6902071" cy="4937760"/>
+            <a:off x="1909482" y="1325880"/>
+            <a:ext cx="8342555" cy="4297680"/>
           </a:xfrm>
           <a:prstGeom prst="rect">
             <a:avLst/>
@@ -4106,6 +4090,41 @@
       <p:sp>
         <p:nvSpPr>
           <p:cNvPr id="7" name="TextBox 6"/>
+          <p:cNvSpPr txBox="1"/>
+          <p:nvPr/>
+        </p:nvSpPr>
+        <p:spPr>
+          <a:xfrm>
+            <a:off x="457200" y="5806440"/>
+            <a:ext cx="11247120" cy="548640"/>
+          </a:xfrm>
+          <a:prstGeom prst="rect">
+            <a:avLst/>
+          </a:prstGeom>
+          <a:noFill/>
+        </p:spPr>
+        <p:txBody>
+          <a:bodyPr wrap="square" anchor="t">
+            <a:spAutoFit/>
+          </a:bodyPr>
+          <a:lstStyle/>
+          <a:p>
+            <a:pPr algn="ctr"/>
+            <a:r>
+              <a:rPr sz="1300" b="1" i="0">
+                <a:solidFill>
+                  <a:srgbClr val="1F2D3D"/>
+                </a:solidFill>
+                <a:latin typeface="Noto Sans CJK KR"/>
+              </a:rPr>
+              <a:t>대부분 시나리오 90~100% · 의존성 체인만 67%로 공통 막힘 (SFT·DPO 동일)</a:t>
+            </a:r>
+          </a:p>
+        </p:txBody>
+      </p:sp>
+      <p:sp>
+        <p:nvSpPr>
+          <p:cNvPr id="8" name="TextBox 7"/>
           <p:cNvSpPr txBox="1"/>
           <p:nvPr/>
         </p:nvSpPr>
@@ -5905,50 +5924,26 @@
           </a:p>
         </p:txBody>
       </p:sp>
-      <p:pic>
-        <p:nvPicPr>
-          <p:cNvPr id="6" name="Picture 5" descr="chart_violation_trend.png"/>
-          <p:cNvPicPr>
-            <a:picLocks noChangeAspect="1"/>
-          </p:cNvPicPr>
-          <p:nvPr/>
-        </p:nvPicPr>
-        <p:blipFill>
-          <a:blip r:embed="rId2"/>
-          <a:stretch>
-            <a:fillRect/>
-          </a:stretch>
-        </p:blipFill>
-        <p:spPr>
-          <a:xfrm>
-            <a:off x="457200" y="2355925"/>
-            <a:ext cx="6766560" cy="2786230"/>
-          </a:xfrm>
-          <a:prstGeom prst="rect">
-            <a:avLst/>
-          </a:prstGeom>
-        </p:spPr>
-      </p:pic>
-      <p:sp>
-        <p:nvSpPr>
-          <p:cNvPr id="7" name="Rectangle 6"/>
+      <p:sp>
+        <p:nvSpPr>
+          <p:cNvPr id="6" name="Rectangle 5"/>
           <p:cNvSpPr/>
           <p:nvPr/>
         </p:nvSpPr>
         <p:spPr>
           <a:xfrm>
-            <a:off x="7406640" y="1371600"/>
-            <a:ext cx="4343400" cy="4572000"/>
+            <a:off x="457200" y="1417320"/>
+            <a:ext cx="11292840" cy="1234440"/>
           </a:xfrm>
           <a:prstGeom prst="rect">
             <a:avLst/>
           </a:prstGeom>
           <a:solidFill>
-            <a:srgbClr val="F4F6F8"/>
+            <a:srgbClr val="FDF3E7"/>
           </a:solidFill>
-          <a:ln w="12700">
+          <a:ln w="25400">
             <a:solidFill>
-              <a:srgbClr val="4C72B0"/>
+              <a:srgbClr val="DD8452"/>
             </a:solidFill>
           </a:ln>
           <a:effectLst/>
@@ -5977,14 +5972,14 @@
       </p:sp>
       <p:sp>
         <p:nvSpPr>
-          <p:cNvPr id="8" name="TextBox 7"/>
+          <p:cNvPr id="7" name="TextBox 6"/>
           <p:cNvSpPr txBox="1"/>
           <p:nvPr/>
         </p:nvSpPr>
         <p:spPr>
           <a:xfrm>
-            <a:off x="7571231" y="1508760"/>
-            <a:ext cx="4023360" cy="4389120"/>
+            <a:off x="640080" y="1536192"/>
+            <a:ext cx="10972800" cy="1051560"/>
           </a:xfrm>
           <a:prstGeom prst="rect">
             <a:avLst/>
@@ -5996,54 +5991,6 @@
             <a:spAutoFit/>
           </a:bodyPr>
           <a:lstStyle/>
-          <a:p>
-            <a:pPr algn="l">
-              <a:spcAft>
-                <a:spcPts val="600"/>
-              </a:spcAft>
-            </a:pPr>
-            <a:r>
-              <a:rPr sz="1500" b="1" i="0">
-                <a:solidFill>
-                  <a:srgbClr val="4C72B0"/>
-                </a:solidFill>
-                <a:latin typeface="Noto Sans CJK KR"/>
-              </a:rPr>
-              <a:t>의존성 체인 약점</a:t>
-            </a:r>
-          </a:p>
-          <a:p>
-            <a:pPr algn="l">
-              <a:spcAft>
-                <a:spcPts val="600"/>
-              </a:spcAft>
-            </a:pPr>
-            <a:r>
-              <a:rPr sz="1200" b="0" i="0">
-                <a:solidFill>
-                  <a:srgbClr val="222222"/>
-                </a:solidFill>
-                <a:latin typeface="Noto Sans CJK KR"/>
-              </a:rPr>
-              <a:t>•  SFT v4와 DPO v5가 체인 쿼리에서 글자 단위로 동일하게 실패</a:t>
-            </a:r>
-          </a:p>
-          <a:p>
-            <a:pPr algn="l" lvl="1">
-              <a:spcAft>
-                <a:spcPts val="800"/>
-              </a:spcAft>
-            </a:pPr>
-            <a:r>
-              <a:rPr sz="1150" b="0" i="0">
-                <a:solidFill>
-                  <a:srgbClr val="5A5A5A"/>
-                </a:solidFill>
-                <a:latin typeface="Noto Sans CJK KR"/>
-              </a:rPr>
-              <a:t>같은 priority_order [5,3,4,1,2], 같은 dependency=2 → 같은 위반 2건</a:t>
-            </a:r>
-          </a:p>
           <a:p>
             <a:pPr algn="l">
               <a:spcAft>
@@ -6051,64 +5998,425 @@
               </a:spcAft>
             </a:pPr>
             <a:r>
-              <a:rPr sz="1200" b="1" i="0">
+              <a:rPr sz="1600" b="1" i="0">
                 <a:solidFill>
                   <a:srgbClr val="DD8452"/>
                 </a:solidFill>
                 <a:latin typeface="Noto Sans CJK KR"/>
               </a:rPr>
-              <a:t>•  체인은 '선호 문제'가 아니라 '능력 부재'</a:t>
-            </a:r>
-          </a:p>
-          <a:p>
-            <a:pPr algn="l" lvl="1">
+              <a:t>의존성 체인에서 SFT v4와 DPO v5가 글자 단위로 동일하게 실패</a:t>
+            </a:r>
+          </a:p>
+          <a:p>
+            <a:pPr algn="l"/>
+            <a:r>
+              <a:rPr sz="1250" b="0" i="0">
+                <a:solidFill>
+                  <a:srgbClr val="222222"/>
+                </a:solidFill>
+                <a:latin typeface="Noto Sans CJK KR"/>
+              </a:rPr>
+              <a:t>같은 priority_order [5,3,4,1,2], 같은 dependency=2 → 동일한 위반 2건. DPO가 체인을 전혀 안 옮겼다.</a:t>
+            </a:r>
+          </a:p>
+        </p:txBody>
+      </p:sp>
+      <p:graphicFrame>
+        <p:nvGraphicFramePr>
+          <p:cNvPr id="8" name="Table 7"/>
+          <p:cNvGraphicFramePr>
+            <a:graphicFrameLocks noGrp="1"/>
+          </p:cNvGraphicFramePr>
+          <p:nvPr/>
+        </p:nvGraphicFramePr>
+        <p:xfrm>
+          <a:off x="457200" y="2926080"/>
+          <a:ext cx="11292840" cy="1371600"/>
+        </p:xfrm>
+        <a:graphic>
+          <a:graphicData uri="http://schemas.openxmlformats.org/drawingml/2006/table">
+            <a:tbl>
+              <a:tblPr firstRow="1" bandRow="1">
+                <a:tableStyleId>{5C22544A-7EE6-4342-B048-85BDC9FD1C3A}</a:tableStyleId>
+              </a:tblPr>
+              <a:tblGrid>
+                <a:gridCol w="4892040"/>
+                <a:gridCol w="2103120"/>
+                <a:gridCol w="2103120"/>
+                <a:gridCol w="2194560"/>
+              </a:tblGrid>
+              <a:tr h="457200">
+                <a:tc>
+                  <a:txBody>
+                    <a:bodyPr wrap="square"/>
+                    <a:lstStyle/>
+                    <a:p>
+                      <a:pPr algn="l"/>
+                      <a:r>
+                        <a:rPr sz="1300" b="1" i="0">
+                          <a:solidFill>
+                            <a:srgbClr val="FFFFFF"/>
+                          </a:solidFill>
+                          <a:latin typeface="Noto Sans CJK KR"/>
+                        </a:rPr>
+                        <a:t>시나리오</a:t>
+                      </a:r>
+                    </a:p>
+                  </a:txBody>
+                  <a:tcPr marL="73152" marR="54864" marT="27432" marB="27432" anchor="ctr">
+                    <a:solidFill>
+                      <a:srgbClr val="DD8452"/>
+                    </a:solidFill>
+                  </a:tcPr>
+                </a:tc>
+                <a:tc>
+                  <a:txBody>
+                    <a:bodyPr wrap="square"/>
+                    <a:lstStyle/>
+                    <a:p>
+                      <a:pPr algn="ctr"/>
+                      <a:r>
+                        <a:rPr sz="1300" b="1" i="0">
+                          <a:solidFill>
+                            <a:srgbClr val="FFFFFF"/>
+                          </a:solidFill>
+                          <a:latin typeface="Noto Sans CJK KR"/>
+                        </a:rPr>
+                        <a:t>SFT v4</a:t>
+                      </a:r>
+                    </a:p>
+                  </a:txBody>
+                  <a:tcPr marL="73152" marR="54864" marT="27432" marB="27432" anchor="ctr">
+                    <a:solidFill>
+                      <a:srgbClr val="DD8452"/>
+                    </a:solidFill>
+                  </a:tcPr>
+                </a:tc>
+                <a:tc>
+                  <a:txBody>
+                    <a:bodyPr wrap="square"/>
+                    <a:lstStyle/>
+                    <a:p>
+                      <a:pPr algn="ctr"/>
+                      <a:r>
+                        <a:rPr sz="1300" b="1" i="0">
+                          <a:solidFill>
+                            <a:srgbClr val="FFFFFF"/>
+                          </a:solidFill>
+                          <a:latin typeface="Noto Sans CJK KR"/>
+                        </a:rPr>
+                        <a:t>DPO v5</a:t>
+                      </a:r>
+                    </a:p>
+                  </a:txBody>
+                  <a:tcPr marL="73152" marR="54864" marT="27432" marB="27432" anchor="ctr">
+                    <a:solidFill>
+                      <a:srgbClr val="DD8452"/>
+                    </a:solidFill>
+                  </a:tcPr>
+                </a:tc>
+                <a:tc>
+                  <a:txBody>
+                    <a:bodyPr wrap="square"/>
+                    <a:lstStyle/>
+                    <a:p>
+                      <a:pPr algn="ctr"/>
+                      <a:r>
+                        <a:rPr sz="1300" b="1" i="0">
+                          <a:solidFill>
+                            <a:srgbClr val="FFFFFF"/>
+                          </a:solidFill>
+                          <a:latin typeface="Noto Sans CJK KR"/>
+                        </a:rPr>
+                        <a:t>변화</a:t>
+                      </a:r>
+                    </a:p>
+                  </a:txBody>
+                  <a:tcPr marL="73152" marR="54864" marT="27432" marB="27432" anchor="ctr">
+                    <a:solidFill>
+                      <a:srgbClr val="DD8452"/>
+                    </a:solidFill>
+                  </a:tcPr>
+                </a:tc>
+              </a:tr>
+              <a:tr h="457200">
+                <a:tc>
+                  <a:txBody>
+                    <a:bodyPr wrap="square"/>
+                    <a:lstStyle/>
+                    <a:p>
+                      <a:pPr algn="l"/>
+                      <a:r>
+                        <a:rPr sz="1300" b="0" i="0">
+                          <a:solidFill>
+                            <a:srgbClr val="222222"/>
+                          </a:solidFill>
+                          <a:latin typeface="Noto Sans CJK KR"/>
+                        </a:rPr>
+                        <a:t>날짜혼재·당일시각·상대날짜</a:t>
+                      </a:r>
+                    </a:p>
+                  </a:txBody>
+                  <a:tcPr marL="73152" marR="54864" marT="27432" marB="27432" anchor="ctr">
+                    <a:solidFill>
+                      <a:srgbClr val="FFFFFF"/>
+                    </a:solidFill>
+                  </a:tcPr>
+                </a:tc>
+                <a:tc>
+                  <a:txBody>
+                    <a:bodyPr wrap="square"/>
+                    <a:lstStyle/>
+                    <a:p>
+                      <a:pPr algn="ctr"/>
+                      <a:r>
+                        <a:rPr sz="1300" b="0" i="0">
+                          <a:solidFill>
+                            <a:srgbClr val="222222"/>
+                          </a:solidFill>
+                          <a:latin typeface="Noto Sans CJK KR"/>
+                        </a:rPr>
+                        <a:t>89~100%</a:t>
+                      </a:r>
+                    </a:p>
+                  </a:txBody>
+                  <a:tcPr marL="73152" marR="54864" marT="27432" marB="27432" anchor="ctr">
+                    <a:solidFill>
+                      <a:srgbClr val="FFFFFF"/>
+                    </a:solidFill>
+                  </a:tcPr>
+                </a:tc>
+                <a:tc>
+                  <a:txBody>
+                    <a:bodyPr wrap="square"/>
+                    <a:lstStyle/>
+                    <a:p>
+                      <a:pPr algn="ctr"/>
+                      <a:r>
+                        <a:rPr sz="1300" b="0" i="0">
+                          <a:solidFill>
+                            <a:srgbClr val="222222"/>
+                          </a:solidFill>
+                          <a:latin typeface="Noto Sans CJK KR"/>
+                        </a:rPr>
+                        <a:t>100%</a:t>
+                      </a:r>
+                    </a:p>
+                  </a:txBody>
+                  <a:tcPr marL="73152" marR="54864" marT="27432" marB="27432" anchor="ctr">
+                    <a:solidFill>
+                      <a:srgbClr val="FFFFFF"/>
+                    </a:solidFill>
+                  </a:tcPr>
+                </a:tc>
+                <a:tc>
+                  <a:txBody>
+                    <a:bodyPr wrap="square"/>
+                    <a:lstStyle/>
+                    <a:p>
+                      <a:pPr algn="ctr"/>
+                      <a:r>
+                        <a:rPr sz="1300" b="0" i="0">
+                          <a:solidFill>
+                            <a:srgbClr val="222222"/>
+                          </a:solidFill>
+                          <a:latin typeface="Noto Sans CJK KR"/>
+                        </a:rPr>
+                        <a:t>유지/소폭 개선</a:t>
+                      </a:r>
+                    </a:p>
+                  </a:txBody>
+                  <a:tcPr marL="73152" marR="54864" marT="27432" marB="27432" anchor="ctr">
+                    <a:solidFill>
+                      <a:srgbClr val="FFFFFF"/>
+                    </a:solidFill>
+                  </a:tcPr>
+                </a:tc>
+              </a:tr>
+              <a:tr h="457200">
+                <a:tc>
+                  <a:txBody>
+                    <a:bodyPr wrap="square"/>
+                    <a:lstStyle/>
+                    <a:p>
+                      <a:pPr algn="l"/>
+                      <a:r>
+                        <a:rPr sz="1300" b="0" i="0">
+                          <a:solidFill>
+                            <a:srgbClr val="222222"/>
+                          </a:solidFill>
+                          <a:latin typeface="Noto Sans CJK KR"/>
+                        </a:rPr>
+                        <a:t>의존성 체인</a:t>
+                      </a:r>
+                    </a:p>
+                  </a:txBody>
+                  <a:tcPr marL="73152" marR="54864" marT="27432" marB="27432" anchor="ctr">
+                    <a:solidFill>
+                      <a:srgbClr val="F4F6F8"/>
+                    </a:solidFill>
+                  </a:tcPr>
+                </a:tc>
+                <a:tc>
+                  <a:txBody>
+                    <a:bodyPr wrap="square"/>
+                    <a:lstStyle/>
+                    <a:p>
+                      <a:pPr algn="ctr"/>
+                      <a:r>
+                        <a:rPr sz="1300" b="0" i="0">
+                          <a:solidFill>
+                            <a:srgbClr val="222222"/>
+                          </a:solidFill>
+                          <a:latin typeface="Noto Sans CJK KR"/>
+                        </a:rPr>
+                        <a:t>67%</a:t>
+                      </a:r>
+                    </a:p>
+                  </a:txBody>
+                  <a:tcPr marL="73152" marR="54864" marT="27432" marB="27432" anchor="ctr">
+                    <a:solidFill>
+                      <a:srgbClr val="F4F6F8"/>
+                    </a:solidFill>
+                  </a:tcPr>
+                </a:tc>
+                <a:tc>
+                  <a:txBody>
+                    <a:bodyPr wrap="square"/>
+                    <a:lstStyle/>
+                    <a:p>
+                      <a:pPr algn="ctr"/>
+                      <a:r>
+                        <a:rPr sz="1300" b="0" i="0">
+                          <a:solidFill>
+                            <a:srgbClr val="222222"/>
+                          </a:solidFill>
+                          <a:latin typeface="Noto Sans CJK KR"/>
+                        </a:rPr>
+                        <a:t>67%</a:t>
+                      </a:r>
+                    </a:p>
+                  </a:txBody>
+                  <a:tcPr marL="73152" marR="54864" marT="27432" marB="27432" anchor="ctr">
+                    <a:solidFill>
+                      <a:srgbClr val="F4F6F8"/>
+                    </a:solidFill>
+                  </a:tcPr>
+                </a:tc>
+                <a:tc>
+                  <a:txBody>
+                    <a:bodyPr wrap="square"/>
+                    <a:lstStyle/>
+                    <a:p>
+                      <a:pPr algn="ctr"/>
+                      <a:r>
+                        <a:rPr sz="1300" b="0" i="0">
+                          <a:solidFill>
+                            <a:srgbClr val="222222"/>
+                          </a:solidFill>
+                          <a:latin typeface="Noto Sans CJK KR"/>
+                        </a:rPr>
+                        <a:t>0 (불변)</a:t>
+                      </a:r>
+                    </a:p>
+                  </a:txBody>
+                  <a:tcPr marL="73152" marR="54864" marT="27432" marB="27432" anchor="ctr">
+                    <a:solidFill>
+                      <a:srgbClr val="F4F6F8"/>
+                    </a:solidFill>
+                  </a:tcPr>
+                </a:tc>
+              </a:tr>
+            </a:tbl>
+          </a:graphicData>
+        </a:graphic>
+      </p:graphicFrame>
+      <p:sp>
+        <p:nvSpPr>
+          <p:cNvPr id="9" name="TextBox 8"/>
+          <p:cNvSpPr txBox="1"/>
+          <p:nvPr/>
+        </p:nvSpPr>
+        <p:spPr>
+          <a:xfrm>
+            <a:off x="457200" y="4663440"/>
+            <a:ext cx="11247120" cy="1645920"/>
+          </a:xfrm>
+          <a:prstGeom prst="rect">
+            <a:avLst/>
+          </a:prstGeom>
+          <a:noFill/>
+        </p:spPr>
+        <p:txBody>
+          <a:bodyPr wrap="square" anchor="t">
+            <a:spAutoFit/>
+          </a:bodyPr>
+          <a:lstStyle/>
+          <a:p>
+            <a:pPr algn="l">
               <a:spcAft>
-                <a:spcPts val="800"/>
+                <a:spcPts val="500"/>
               </a:spcAft>
             </a:pPr>
             <a:r>
-              <a:rPr sz="1150" b="0" i="0">
-                <a:solidFill>
-                  <a:srgbClr val="5A5A5A"/>
-                </a:solidFill>
-                <a:latin typeface="Noto Sans CJK KR"/>
-              </a:rPr>
-              <a:t>DPO는 모델이 정답을 생성할 수 있는데 잘못 선택할 때만 효과적</a:t>
+              <a:rPr sz="1400" b="1" i="0">
+                <a:solidFill>
+                  <a:srgbClr val="1F2D3D"/>
+                </a:solidFill>
+                <a:latin typeface="Noto Sans CJK KR"/>
+              </a:rPr>
+              <a:t>왜 DPO가 체인을 못 고쳤나</a:t>
             </a:r>
           </a:p>
           <a:p>
             <a:pPr algn="l">
               <a:spcAft>
-                <a:spcPts val="600"/>
+                <a:spcPts val="400"/>
               </a:spcAft>
             </a:pPr>
             <a:r>
-              <a:rPr sz="1200" b="0" i="0">
+              <a:rPr sz="1250" b="0" i="0">
                 <a:solidFill>
                   <a:srgbClr val="222222"/>
                 </a:solidFill>
                 <a:latin typeface="Noto Sans CJK KR"/>
               </a:rPr>
-              <a:t>•  reward_accuracy 98.9% → 이미 아는 것 재학습</a:t>
+              <a:t>•  DPO는 '모델이 정답을 생성할 수 있는데 잘못 선택'할 때만 효과적 — 체인은 4B 모델의 능력 부재라 선호학습으로 안 됨</a:t>
+            </a:r>
+          </a:p>
+          <a:p>
+            <a:pPr algn="l">
+              <a:spcAft>
+                <a:spcPts val="400"/>
+              </a:spcAft>
+            </a:pPr>
+            <a:r>
+              <a:rPr sz="1250" b="0" i="0">
+                <a:solidFill>
+                  <a:srgbClr val="222222"/>
+                </a:solidFill>
+                <a:latin typeface="Noto Sans CJK KR"/>
+              </a:rPr>
+              <a:t>•  reward_accuracy 98.9% → 이미 아는 것을 재학습한 셈 (가중치 변화 미미)</a:t>
             </a:r>
           </a:p>
           <a:p>
             <a:pPr algn="l"/>
             <a:r>
-              <a:rPr sz="1200" b="1" i="0">
+              <a:rPr sz="1250" b="1" i="0">
                 <a:solidFill>
                   <a:srgbClr val="55A868"/>
                 </a:solidFill>
                 <a:latin typeface="Noto Sans CJK KR"/>
               </a:rPr>
-              <a:t>•  해결책: chain 특화 SFT 데이터 3× 증량 (선호학습 아님)</a:t>
-            </a:r>
-          </a:p>
-        </p:txBody>
-      </p:sp>
-      <p:sp>
-        <p:nvSpPr>
-          <p:cNvPr id="9" name="TextBox 8"/>
+              <a:t>•  해결책: 4–5단계 긴 체인 특화 SFT 데이터 3× 증량 (선호학습이 아닌 능력 보강)</a:t>
+            </a:r>
+          </a:p>
+        </p:txBody>
+      </p:sp>
+      <p:sp>
+        <p:nvSpPr>
+          <p:cNvPr id="10" name="TextBox 9"/>
           <p:cNvSpPr txBox="1"/>
           <p:nvPr/>
         </p:nvSpPr>

--- a/presentation/TimeSorter_발표자료.pptx
+++ b/presentation/TimeSorter_발표자료.pptx
@@ -21,6 +21,7 @@
     <p:sldId id="269" r:id="rId20"/>
     <p:sldId id="270" r:id="rId21"/>
     <p:sldId id="271" r:id="rId22"/>
+    <p:sldId id="272" r:id="rId23"/>
   </p:sldIdLst>
   <p:sldSz cx="12191695" cy="6858000" type="screen4x3"/>
   <p:notesSz cx="6858000" cy="9144000"/>
@@ -5254,24 +5255,48 @@
           </a:p>
         </p:txBody>
       </p:sp>
-      <p:sp>
-        <p:nvSpPr>
-          <p:cNvPr id="6" name="Rectangle 5"/>
+      <p:pic>
+        <p:nvPicPr>
+          <p:cNvPr id="6" name="Picture 5" descr="chart_schema_vs_content.png"/>
+          <p:cNvPicPr>
+            <a:picLocks noChangeAspect="1"/>
+          </p:cNvPicPr>
+          <p:nvPr/>
+        </p:nvPicPr>
+        <p:blipFill>
+          <a:blip r:embed="rId2"/>
+          <a:stretch>
+            <a:fillRect/>
+          </a:stretch>
+        </p:blipFill>
+        <p:spPr>
+          <a:xfrm>
+            <a:off x="365760" y="1836651"/>
+            <a:ext cx="7315200" cy="3916218"/>
+          </a:xfrm>
+          <a:prstGeom prst="rect">
+            <a:avLst/>
+          </a:prstGeom>
+        </p:spPr>
+      </p:pic>
+      <p:sp>
+        <p:nvSpPr>
+          <p:cNvPr id="7" name="Rectangle 6"/>
           <p:cNvSpPr/>
           <p:nvPr/>
         </p:nvSpPr>
         <p:spPr>
           <a:xfrm>
-            <a:off x="457200" y="1417320"/>
-            <a:ext cx="11292840" cy="1371600"/>
+            <a:off x="7863840" y="1371600"/>
+            <a:ext cx="3931920" cy="4572000"/>
           </a:xfrm>
           <a:prstGeom prst="rect">
             <a:avLst/>
           </a:prstGeom>
           <a:solidFill>
-            <a:srgbClr val="FDF3E7"/>
+            <a:srgbClr val="F4F6F8"/>
           </a:solidFill>
-          <a:ln w="25400">
+          <a:ln w="19050">
             <a:solidFill>
               <a:srgbClr val="DD8452"/>
             </a:solidFill>
@@ -5302,14 +5327,14 @@
       </p:sp>
       <p:sp>
         <p:nvSpPr>
-          <p:cNvPr id="7" name="TextBox 6"/>
+          <p:cNvPr id="8" name="TextBox 7"/>
           <p:cNvSpPr txBox="1"/>
           <p:nvPr/>
         </p:nvSpPr>
         <p:spPr>
           <a:xfrm>
-            <a:off x="640080" y="1536192"/>
-            <a:ext cx="10972800" cy="1188720"/>
+            <a:off x="8028431" y="1508760"/>
+            <a:ext cx="3611880" cy="4389120"/>
           </a:xfrm>
           <a:prstGeom prst="rect">
             <a:avLst/>
@@ -5324,44 +5349,370 @@
           <a:p>
             <a:pPr algn="l">
               <a:spcAft>
-                <a:spcPts val="400"/>
+                <a:spcPts val="600"/>
               </a:spcAft>
             </a:pPr>
             <a:r>
-              <a:rPr sz="1600" b="1" i="0">
+              <a:rPr sz="1500" b="1" i="0">
                 <a:solidFill>
                   <a:srgbClr val="DD8452"/>
                 </a:solidFill>
                 <a:latin typeface="Noto Sans CJK KR"/>
               </a:rPr>
-              <a:t>"instruct 모델 0%"는 추론 실패가 아니다 — 출력 스키마 미준수다</a:t>
+              <a:t>"0%"의 진실</a:t>
+            </a:r>
+          </a:p>
+          <a:p>
+            <a:pPr algn="l">
+              <a:spcAft>
+                <a:spcPts val="500"/>
+              </a:spcAft>
+            </a:pPr>
+            <a:r>
+              <a:rPr sz="1150" b="0" i="0">
+                <a:solidFill>
+                  <a:srgbClr val="222222"/>
+                </a:solidFill>
+                <a:latin typeface="Noto Sans CJK KR"/>
+              </a:rPr>
+              <a:t>•  no-FT 모델은 tasks를 ["문자열"]로 출력해 파싱 실패 → 스키마 0%</a:t>
+            </a:r>
+          </a:p>
+          <a:p>
+            <a:pPr algn="l">
+              <a:spcAft>
+                <a:spcPts val="500"/>
+              </a:spcAft>
+            </a:pPr>
+            <a:r>
+              <a:rPr sz="1150" b="0" i="0">
+                <a:solidFill>
+                  <a:srgbClr val="222222"/>
+                </a:solidFill>
+                <a:latin typeface="Noto Sans CJK KR"/>
+              </a:rPr>
+              <a:t>•  하지만 priority_order·scores는 정상 → id 재구성 후 내용만 채점하면:</a:t>
+            </a:r>
+          </a:p>
+          <a:p>
+            <a:pPr algn="l" lvl="1">
+              <a:spcAft>
+                <a:spcPts val="200"/>
+              </a:spcAft>
+            </a:pPr>
+            <a:r>
+              <a:rPr sz="1250" b="1" i="0">
+                <a:solidFill>
+                  <a:srgbClr val="4C72B0"/>
+                </a:solidFill>
+                <a:latin typeface="Noto Sans CJK KR"/>
+              </a:rPr>
+              <a:t>instruct 0% → 내용 43.3%</a:t>
+            </a:r>
+          </a:p>
+          <a:p>
+            <a:pPr algn="l" lvl="1">
+              <a:spcAft>
+                <a:spcPts val="600"/>
+              </a:spcAft>
+            </a:pPr>
+            <a:r>
+              <a:rPr sz="1250" b="1" i="0">
+                <a:solidFill>
+                  <a:srgbClr val="4C72B0"/>
+                </a:solidFill>
+                <a:latin typeface="Noto Sans CJK KR"/>
+              </a:rPr>
+              <a:t>base 16.7% → 내용 40.0%</a:t>
+            </a:r>
+          </a:p>
+          <a:p>
+            <a:pPr algn="l">
+              <a:spcAft>
+                <a:spcPts val="500"/>
+              </a:spcAft>
+            </a:pPr>
+            <a:r>
+              <a:rPr sz="1150" b="0" i="0">
+                <a:solidFill>
+                  <a:srgbClr val="5A5A5A"/>
+                </a:solidFill>
+                <a:latin typeface="Noto Sans CJK KR"/>
+              </a:rPr>
+              <a:t>•  추론 능력의 40%+ 는 이미 있었다 — 파인튜닝이 그것을 앱 규격으로 고정</a:t>
             </a:r>
           </a:p>
           <a:p>
             <a:pPr algn="l"/>
             <a:r>
-              <a:rPr sz="1250" b="0" i="0">
-                <a:solidFill>
-                  <a:srgbClr val="222222"/>
-                </a:solidFill>
-                <a:latin typeface="Noto Sans CJK KR"/>
-              </a:rPr>
-              <a:t>instruct는 tasks를 [{"id","text"}]가 아닌 ["문자열"] 형태로 출력해 파싱 전부 실패. 실제 추론은 합리적이었다 (체인 순서 [5,1,3,4,2]로 정확).</a:t>
+              <a:rPr sz="1150" b="0" i="0">
+                <a:solidFill>
+                  <a:srgbClr val="5A5A5A"/>
+                </a:solidFill>
+                <a:latin typeface="Noto Sans CJK KR"/>
+              </a:rPr>
+              <a:t>•  FT 모델은 스키마=내용 (갭 없음)</a:t>
+            </a:r>
+          </a:p>
+        </p:txBody>
+      </p:sp>
+      <p:sp>
+        <p:nvSpPr>
+          <p:cNvPr id="9" name="TextBox 8"/>
+          <p:cNvSpPr txBox="1"/>
+          <p:nvPr/>
+        </p:nvSpPr>
+        <p:spPr>
+          <a:xfrm>
+            <a:off x="10789920" y="6446520"/>
+            <a:ext cx="1280160" cy="320040"/>
+          </a:xfrm>
+          <a:prstGeom prst="rect">
+            <a:avLst/>
+          </a:prstGeom>
+          <a:noFill/>
+        </p:spPr>
+        <p:txBody>
+          <a:bodyPr wrap="square" anchor="t">
+            <a:spAutoFit/>
+          </a:bodyPr>
+          <a:lstStyle/>
+          <a:p>
+            <a:pPr algn="r"/>
+            <a:r>
+              <a:rPr sz="1000" b="0" i="0">
+                <a:solidFill>
+                  <a:srgbClr val="5A5A5A"/>
+                </a:solidFill>
+                <a:latin typeface="Noto Sans CJK KR"/>
+              </a:rPr>
+              <a:t>14</a:t>
+            </a:r>
+          </a:p>
+        </p:txBody>
+      </p:sp>
+    </p:spTree>
+  </p:cSld>
+  <p:clrMapOvr>
+    <a:masterClrMapping/>
+  </p:clrMapOvr>
+</p:sld>
+</file>
+
+<file path=ppt/slides/slide15.xml><?xml version="1.0" encoding="utf-8"?>
+<p:sld xmlns:a="http://schemas.openxmlformats.org/drawingml/2006/main" xmlns:p="http://schemas.openxmlformats.org/presentationml/2006/main" xmlns:r="http://schemas.openxmlformats.org/officeDocument/2006/relationships">
+  <p:cSld>
+    <p:spTree>
+      <p:nvGrpSpPr>
+        <p:cNvPr id="1" name=""/>
+        <p:cNvGrpSpPr/>
+        <p:nvPr/>
+      </p:nvGrpSpPr>
+      <p:grpSpPr/>
+      <p:sp>
+        <p:nvSpPr>
+          <p:cNvPr id="2" name="Rectangle 1"/>
+          <p:cNvSpPr/>
+          <p:nvPr/>
+        </p:nvSpPr>
+        <p:spPr>
+          <a:xfrm>
+            <a:off x="0" y="0"/>
+            <a:ext cx="12191695" cy="1051560"/>
+          </a:xfrm>
+          <a:prstGeom prst="rect">
+            <a:avLst/>
+          </a:prstGeom>
+          <a:solidFill>
+            <a:srgbClr val="1F2D3D"/>
+          </a:solidFill>
+          <a:ln>
+            <a:noFill/>
+          </a:ln>
+          <a:effectLst/>
+        </p:spPr>
+        <p:style>
+          <a:lnRef idx="1">
+            <a:schemeClr val="accent1"/>
+          </a:lnRef>
+          <a:fillRef idx="3">
+            <a:schemeClr val="accent1"/>
+          </a:fillRef>
+          <a:effectRef idx="2">
+            <a:schemeClr val="accent1"/>
+          </a:effectRef>
+          <a:fontRef idx="minor">
+            <a:schemeClr val="lt1"/>
+          </a:fontRef>
+        </p:style>
+        <p:txBody>
+          <a:bodyPr rtlCol="0" anchor="ctr"/>
+          <a:lstStyle/>
+          <a:p>
+            <a:pPr algn="ctr"/>
+          </a:p>
+        </p:txBody>
+      </p:sp>
+      <p:sp>
+        <p:nvSpPr>
+          <p:cNvPr id="3" name="Rectangle 2"/>
+          <p:cNvSpPr/>
+          <p:nvPr/>
+        </p:nvSpPr>
+        <p:spPr>
+          <a:xfrm>
+            <a:off x="0" y="1051560"/>
+            <a:ext cx="12191695" cy="38100"/>
+          </a:xfrm>
+          <a:prstGeom prst="rect">
+            <a:avLst/>
+          </a:prstGeom>
+          <a:solidFill>
+            <a:srgbClr val="DD8452"/>
+          </a:solidFill>
+          <a:ln>
+            <a:noFill/>
+          </a:ln>
+          <a:effectLst/>
+        </p:spPr>
+        <p:style>
+          <a:lnRef idx="1">
+            <a:schemeClr val="accent1"/>
+          </a:lnRef>
+          <a:fillRef idx="3">
+            <a:schemeClr val="accent1"/>
+          </a:fillRef>
+          <a:effectRef idx="2">
+            <a:schemeClr val="accent1"/>
+          </a:effectRef>
+          <a:fontRef idx="minor">
+            <a:schemeClr val="lt1"/>
+          </a:fontRef>
+        </p:style>
+        <p:txBody>
+          <a:bodyPr rtlCol="0" anchor="ctr"/>
+          <a:lstStyle/>
+          <a:p>
+            <a:pPr algn="ctr"/>
+          </a:p>
+        </p:txBody>
+      </p:sp>
+      <p:sp>
+        <p:nvSpPr>
+          <p:cNvPr id="4" name="TextBox 3"/>
+          <p:cNvSpPr txBox="1"/>
+          <p:nvPr/>
+        </p:nvSpPr>
+        <p:spPr>
+          <a:xfrm>
+            <a:off x="457200" y="128016"/>
+            <a:ext cx="10972800" cy="320040"/>
+          </a:xfrm>
+          <a:prstGeom prst="rect">
+            <a:avLst/>
+          </a:prstGeom>
+          <a:noFill/>
+        </p:spPr>
+        <p:txBody>
+          <a:bodyPr wrap="square" anchor="t">
+            <a:spAutoFit/>
+          </a:bodyPr>
+          <a:lstStyle/>
+          <a:p>
+            <a:pPr algn="l"/>
+            <a:r>
+              <a:rPr sz="1200" b="1" i="0">
+                <a:solidFill>
+                  <a:srgbClr val="DD8452"/>
+                </a:solidFill>
+                <a:latin typeface="Noto Sans CJK KR"/>
+              </a:rPr>
+              <a:t>KEY FINDING ①-b</a:t>
+            </a:r>
+          </a:p>
+        </p:txBody>
+      </p:sp>
+      <p:sp>
+        <p:nvSpPr>
+          <p:cNvPr id="5" name="TextBox 4"/>
+          <p:cNvSpPr txBox="1"/>
+          <p:nvPr/>
+        </p:nvSpPr>
+        <p:spPr>
+          <a:xfrm>
+            <a:off x="457200" y="384048"/>
+            <a:ext cx="11247120" cy="594360"/>
+          </a:xfrm>
+          <a:prstGeom prst="rect">
+            <a:avLst/>
+          </a:prstGeom>
+          <a:noFill/>
+        </p:spPr>
+        <p:txBody>
+          <a:bodyPr wrap="square" anchor="t">
+            <a:spAutoFit/>
+          </a:bodyPr>
+          <a:lstStyle/>
+          <a:p>
+            <a:pPr algn="l"/>
+            <a:r>
+              <a:rPr sz="2600" b="1" i="0">
+                <a:solidFill>
+                  <a:srgbClr val="FFFFFF"/>
+                </a:solidFill>
+                <a:latin typeface="Noto Sans CJK KR"/>
+              </a:rPr>
+              <a:t>no-FT 모델의 숨은 추론 능력 — 시나리오별</a:t>
+            </a:r>
+          </a:p>
+        </p:txBody>
+      </p:sp>
+      <p:sp>
+        <p:nvSpPr>
+          <p:cNvPr id="6" name="TextBox 5"/>
+          <p:cNvSpPr txBox="1"/>
+          <p:nvPr/>
+        </p:nvSpPr>
+        <p:spPr>
+          <a:xfrm>
+            <a:off x="457200" y="1280160"/>
+            <a:ext cx="11247120" cy="502920"/>
+          </a:xfrm>
+          <a:prstGeom prst="rect">
+            <a:avLst/>
+          </a:prstGeom>
+          <a:noFill/>
+        </p:spPr>
+        <p:txBody>
+          <a:bodyPr wrap="square" anchor="t">
+            <a:spAutoFit/>
+          </a:bodyPr>
+          <a:lstStyle/>
+          <a:p>
+            <a:pPr algn="l"/>
+            <a:r>
+              <a:rPr sz="1400" b="1" i="0">
+                <a:solidFill>
+                  <a:srgbClr val="1F2D3D"/>
+                </a:solidFill>
+                <a:latin typeface="Noto Sans CJK KR"/>
+              </a:rPr>
+              <a:t>Qwen3.5-4B instruct (어댑터 없음) — 스키마 기준 전부 0%지만, 내용만 보면:</a:t>
             </a:r>
           </a:p>
         </p:txBody>
       </p:sp>
       <p:graphicFrame>
         <p:nvGraphicFramePr>
-          <p:cNvPr id="8" name="Table 7"/>
+          <p:cNvPr id="7" name="Table 6"/>
           <p:cNvGraphicFramePr>
             <a:graphicFrameLocks noGrp="1"/>
           </p:cNvGraphicFramePr>
           <p:nvPr/>
         </p:nvGraphicFramePr>
         <p:xfrm>
-          <a:off x="457200" y="3108960"/>
-          <a:ext cx="11292840" cy="1828800"/>
+          <a:off x="457200" y="1874519"/>
+          <a:ext cx="11292840" cy="2468880"/>
         </p:xfrm>
         <a:graphic>
           <a:graphicData uri="http://schemas.openxmlformats.org/drawingml/2006/table">
@@ -5370,11 +5721,12 @@
                 <a:tableStyleId>{5C22544A-7EE6-4342-B048-85BDC9FD1C3A}</a:tableStyleId>
               </a:tblPr>
               <a:tblGrid>
-                <a:gridCol w="4114800"/>
-                <a:gridCol w="2606040"/>
-                <a:gridCol w="4572000"/>
+                <a:gridCol w="2377440"/>
+                <a:gridCol w="2286000"/>
+                <a:gridCol w="2377440"/>
+                <a:gridCol w="4251960"/>
               </a:tblGrid>
-              <a:tr h="457200">
+              <a:tr h="411480">
                 <a:tc>
                   <a:txBody>
                     <a:bodyPr wrap="square"/>
@@ -5388,13 +5740,13 @@
                           </a:solidFill>
                           <a:latin typeface="Noto Sans CJK KR"/>
                         </a:rPr>
-                        <a:t>모델</a:t>
+                        <a:t>시나리오</a:t>
                       </a:r>
                     </a:p>
                   </a:txBody>
                   <a:tcPr marL="73152" marR="54864" marT="27432" marB="27432" anchor="ctr">
                     <a:solidFill>
-                      <a:srgbClr val="DD8452"/>
+                      <a:srgbClr val="4C72B0"/>
                     </a:solidFill>
                   </a:tcPr>
                 </a:tc>
@@ -5411,13 +5763,13 @@
                           </a:solidFill>
                           <a:latin typeface="Noto Sans CJK KR"/>
                         </a:rPr>
-                        <a:t>통과율(n=30)</a:t>
+                        <a:t>스키마 통과</a:t>
                       </a:r>
                     </a:p>
                   </a:txBody>
                   <a:tcPr marL="73152" marR="54864" marT="27432" marB="27432" anchor="ctr">
                     <a:solidFill>
-                      <a:srgbClr val="DD8452"/>
+                      <a:srgbClr val="4C72B0"/>
                     </a:solidFill>
                   </a:tcPr>
                 </a:tc>
@@ -5434,18 +5786,41 @@
                           </a:solidFill>
                           <a:latin typeface="Noto Sans CJK KR"/>
                         </a:rPr>
-                        <a:t>원인</a:t>
+                        <a:t>내용 통과</a:t>
                       </a:r>
                     </a:p>
                   </a:txBody>
                   <a:tcPr marL="73152" marR="54864" marT="27432" marB="27432" anchor="ctr">
                     <a:solidFill>
-                      <a:srgbClr val="DD8452"/>
+                      <a:srgbClr val="4C72B0"/>
+                    </a:solidFill>
+                  </a:tcPr>
+                </a:tc>
+                <a:tc>
+                  <a:txBody>
+                    <a:bodyPr wrap="square"/>
+                    <a:lstStyle/>
+                    <a:p>
+                      <a:pPr algn="ctr"/>
+                      <a:r>
+                        <a:rPr sz="1300" b="1" i="0">
+                          <a:solidFill>
+                            <a:srgbClr val="FFFFFF"/>
+                          </a:solidFill>
+                          <a:latin typeface="Noto Sans CJK KR"/>
+                        </a:rPr>
+                        <a:t>해석</a:t>
+                      </a:r>
+                    </a:p>
+                  </a:txBody>
+                  <a:tcPr marL="73152" marR="54864" marT="27432" marB="27432" anchor="ctr">
+                    <a:solidFill>
+                      <a:srgbClr val="4C72B0"/>
                     </a:solidFill>
                   </a:tcPr>
                 </a:tc>
               </a:tr>
-              <a:tr h="457200">
+              <a:tr h="411480">
                 <a:tc>
                   <a:txBody>
                     <a:bodyPr wrap="square"/>
@@ -5453,13 +5828,13 @@
                     <a:p>
                       <a:pPr algn="l"/>
                       <a:r>
-                        <a:rPr sz="1300" b="0" i="0">
+                        <a:rPr sz="1250" b="0" i="0">
                           <a:solidFill>
                             <a:srgbClr val="222222"/>
                           </a:solidFill>
                           <a:latin typeface="Noto Sans CJK KR"/>
                         </a:rPr>
-                        <a:t>Qwen3.5-4B instruct (no FT)</a:t>
+                        <a:t>리스크</a:t>
                       </a:r>
                     </a:p>
                   </a:txBody>
@@ -5476,13 +5851,13 @@
                     <a:p>
                       <a:pPr algn="ctr"/>
                       <a:r>
-                        <a:rPr sz="1300" b="0" i="0">
+                        <a:rPr sz="1250" b="0" i="0">
                           <a:solidFill>
                             <a:srgbClr val="222222"/>
                           </a:solidFill>
                           <a:latin typeface="Noto Sans CJK KR"/>
                         </a:rPr>
-                        <a:t>0.0%</a:t>
+                        <a:t>0/5</a:t>
                       </a:r>
                     </a:p>
                   </a:txBody>
@@ -5499,13 +5874,36 @@
                     <a:p>
                       <a:pPr algn="ctr"/>
                       <a:r>
-                        <a:rPr sz="1300" b="0" i="0">
+                        <a:rPr sz="1250" b="0" i="0">
                           <a:solidFill>
                             <a:srgbClr val="222222"/>
                           </a:solidFill>
                           <a:latin typeface="Noto Sans CJK KR"/>
                         </a:rPr>
-                        <a:t>tasks를 문자열 배열로 출력 → 파싱 실패</a:t>
+                        <a:t>5/5 (100%)</a:t>
+                      </a:r>
+                    </a:p>
+                  </a:txBody>
+                  <a:tcPr marL="73152" marR="54864" marT="27432" marB="27432" anchor="ctr">
+                    <a:solidFill>
+                      <a:srgbClr val="FFFFFF"/>
+                    </a:solidFill>
+                  </a:tcPr>
+                </a:tc>
+                <a:tc>
+                  <a:txBody>
+                    <a:bodyPr wrap="square"/>
+                    <a:lstStyle/>
+                    <a:p>
+                      <a:pPr algn="ctr"/>
+                      <a:r>
+                        <a:rPr sz="1250" b="0" i="0">
+                          <a:solidFill>
+                            <a:srgbClr val="222222"/>
+                          </a:solidFill>
+                          <a:latin typeface="Noto Sans CJK KR"/>
+                        </a:rPr>
+                        <a:t>추론 완벽 — 포맷만 못 맞춤</a:t>
                       </a:r>
                     </a:p>
                   </a:txBody>
@@ -5516,7 +5914,7 @@
                   </a:tcPr>
                 </a:tc>
               </a:tr>
-              <a:tr h="457200">
+              <a:tr h="411480">
                 <a:tc>
                   <a:txBody>
                     <a:bodyPr wrap="square"/>
@@ -5524,13 +5922,13 @@
                     <a:p>
                       <a:pPr algn="l"/>
                       <a:r>
-                        <a:rPr sz="1300" b="0" i="0">
+                        <a:rPr sz="1250" b="0" i="0">
                           <a:solidFill>
                             <a:srgbClr val="222222"/>
                           </a:solidFill>
                           <a:latin typeface="Noto Sans CJK KR"/>
                         </a:rPr>
-                        <a:t>Qwen3.5-4B-Base (no FT)</a:t>
+                        <a:t>상대 날짜</a:t>
                       </a:r>
                     </a:p>
                   </a:txBody>
@@ -5547,13 +5945,13 @@
                     <a:p>
                       <a:pPr algn="ctr"/>
                       <a:r>
-                        <a:rPr sz="1300" b="0" i="0">
+                        <a:rPr sz="1250" b="0" i="0">
                           <a:solidFill>
                             <a:srgbClr val="222222"/>
                           </a:solidFill>
                           <a:latin typeface="Noto Sans CJK KR"/>
                         </a:rPr>
-                        <a:t>16.7%</a:t>
+                        <a:t>0/4</a:t>
                       </a:r>
                     </a:p>
                   </a:txBody>
@@ -5570,13 +5968,36 @@
                     <a:p>
                       <a:pPr algn="ctr"/>
                       <a:r>
-                        <a:rPr sz="1300" b="0" i="0">
+                        <a:rPr sz="1250" b="0" i="0">
                           <a:solidFill>
                             <a:srgbClr val="222222"/>
                           </a:solidFill>
                           <a:latin typeface="Noto Sans CJK KR"/>
                         </a:rPr>
-                        <a:t>시스템 프롬프트 스키마 예시를 더 충실히 모방</a:t>
+                        <a:t>4/4 (100%)</a:t>
+                      </a:r>
+                    </a:p>
+                  </a:txBody>
+                  <a:tcPr marL="73152" marR="54864" marT="27432" marB="27432" anchor="ctr">
+                    <a:solidFill>
+                      <a:srgbClr val="F4F6F8"/>
+                    </a:solidFill>
+                  </a:tcPr>
+                </a:tc>
+                <a:tc>
+                  <a:txBody>
+                    <a:bodyPr wrap="square"/>
+                    <a:lstStyle/>
+                    <a:p>
+                      <a:pPr algn="ctr"/>
+                      <a:r>
+                        <a:rPr sz="1250" b="0" i="0">
+                          <a:solidFill>
+                            <a:srgbClr val="222222"/>
+                          </a:solidFill>
+                          <a:latin typeface="Noto Sans CJK KR"/>
+                        </a:rPr>
+                        <a:t>추론 완벽 — 포맷만 못 맞춤</a:t>
                       </a:r>
                     </a:p>
                   </a:txBody>
@@ -5587,7 +6008,7 @@
                   </a:tcPr>
                 </a:tc>
               </a:tr>
-              <a:tr h="457200">
+              <a:tr h="411480">
                 <a:tc>
                   <a:txBody>
                     <a:bodyPr wrap="square"/>
@@ -5595,13 +6016,13 @@
                     <a:p>
                       <a:pPr algn="l"/>
                       <a:r>
-                        <a:rPr sz="1300" b="0" i="0">
+                        <a:rPr sz="1250" b="0" i="0">
                           <a:solidFill>
                             <a:srgbClr val="222222"/>
                           </a:solidFill>
                           <a:latin typeface="Noto Sans CJK KR"/>
                         </a:rPr>
-                        <a:t>+ SFT v4</a:t>
+                        <a:t>당일 시각</a:t>
                       </a:r>
                     </a:p>
                   </a:txBody>
@@ -5618,13 +6039,13 @@
                     <a:p>
                       <a:pPr algn="ctr"/>
                       <a:r>
-                        <a:rPr sz="1300" b="0" i="0">
+                        <a:rPr sz="1250" b="0" i="0">
                           <a:solidFill>
                             <a:srgbClr val="222222"/>
                           </a:solidFill>
                           <a:latin typeface="Noto Sans CJK KR"/>
                         </a:rPr>
-                        <a:t>90.0%</a:t>
+                        <a:t>0/6</a:t>
                       </a:r>
                     </a:p>
                   </a:txBody>
@@ -5641,13 +6062,224 @@
                     <a:p>
                       <a:pPr algn="ctr"/>
                       <a:r>
-                        <a:rPr sz="1300" b="0" i="0">
+                        <a:rPr sz="1250" b="0" i="0">
                           <a:solidFill>
                             <a:srgbClr val="222222"/>
                           </a:solidFill>
                           <a:latin typeface="Noto Sans CJK KR"/>
                         </a:rPr>
-                        <a:t>정확한 JSON 스키마 + 채점 규칙 학습</a:t>
+                        <a:t>2/6 (33%)</a:t>
+                      </a:r>
+                    </a:p>
+                  </a:txBody>
+                  <a:tcPr marL="73152" marR="54864" marT="27432" marB="27432" anchor="ctr">
+                    <a:solidFill>
+                      <a:srgbClr val="FFFFFF"/>
+                    </a:solidFill>
+                  </a:tcPr>
+                </a:tc>
+                <a:tc>
+                  <a:txBody>
+                    <a:bodyPr wrap="square"/>
+                    <a:lstStyle/>
+                    <a:p>
+                      <a:pPr algn="ctr"/>
+                      <a:r>
+                        <a:rPr sz="1250" b="0" i="0">
+                          <a:solidFill>
+                            <a:srgbClr val="222222"/>
+                          </a:solidFill>
+                          <a:latin typeface="Noto Sans CJK KR"/>
+                        </a:rPr>
+                        <a:t>시각 순서 추론 약함</a:t>
+                      </a:r>
+                    </a:p>
+                  </a:txBody>
+                  <a:tcPr marL="73152" marR="54864" marT="27432" marB="27432" anchor="ctr">
+                    <a:solidFill>
+                      <a:srgbClr val="FFFFFF"/>
+                    </a:solidFill>
+                  </a:tcPr>
+                </a:tc>
+              </a:tr>
+              <a:tr h="411480">
+                <a:tc>
+                  <a:txBody>
+                    <a:bodyPr wrap="square"/>
+                    <a:lstStyle/>
+                    <a:p>
+                      <a:pPr algn="l"/>
+                      <a:r>
+                        <a:rPr sz="1250" b="0" i="0">
+                          <a:solidFill>
+                            <a:srgbClr val="222222"/>
+                          </a:solidFill>
+                          <a:latin typeface="Noto Sans CJK KR"/>
+                        </a:rPr>
+                        <a:t>날짜 혼재</a:t>
+                      </a:r>
+                    </a:p>
+                  </a:txBody>
+                  <a:tcPr marL="73152" marR="54864" marT="27432" marB="27432" anchor="ctr">
+                    <a:solidFill>
+                      <a:srgbClr val="F4F6F8"/>
+                    </a:solidFill>
+                  </a:tcPr>
+                </a:tc>
+                <a:tc>
+                  <a:txBody>
+                    <a:bodyPr wrap="square"/>
+                    <a:lstStyle/>
+                    <a:p>
+                      <a:pPr algn="ctr"/>
+                      <a:r>
+                        <a:rPr sz="1250" b="0" i="0">
+                          <a:solidFill>
+                            <a:srgbClr val="222222"/>
+                          </a:solidFill>
+                          <a:latin typeface="Noto Sans CJK KR"/>
+                        </a:rPr>
+                        <a:t>0/9</a:t>
+                      </a:r>
+                    </a:p>
+                  </a:txBody>
+                  <a:tcPr marL="73152" marR="54864" marT="27432" marB="27432" anchor="ctr">
+                    <a:solidFill>
+                      <a:srgbClr val="F4F6F8"/>
+                    </a:solidFill>
+                  </a:tcPr>
+                </a:tc>
+                <a:tc>
+                  <a:txBody>
+                    <a:bodyPr wrap="square"/>
+                    <a:lstStyle/>
+                    <a:p>
+                      <a:pPr algn="ctr"/>
+                      <a:r>
+                        <a:rPr sz="1250" b="0" i="0">
+                          <a:solidFill>
+                            <a:srgbClr val="222222"/>
+                          </a:solidFill>
+                          <a:latin typeface="Noto Sans CJK KR"/>
+                        </a:rPr>
+                        <a:t>2/9 (22%)</a:t>
+                      </a:r>
+                    </a:p>
+                  </a:txBody>
+                  <a:tcPr marL="73152" marR="54864" marT="27432" marB="27432" anchor="ctr">
+                    <a:solidFill>
+                      <a:srgbClr val="F4F6F8"/>
+                    </a:solidFill>
+                  </a:tcPr>
+                </a:tc>
+                <a:tc>
+                  <a:txBody>
+                    <a:bodyPr wrap="square"/>
+                    <a:lstStyle/>
+                    <a:p>
+                      <a:pPr algn="ctr"/>
+                      <a:r>
+                        <a:rPr sz="1250" b="0" i="0">
+                          <a:solidFill>
+                            <a:srgbClr val="222222"/>
+                          </a:solidFill>
+                          <a:latin typeface="Noto Sans CJK KR"/>
+                        </a:rPr>
+                        <a:t>지난 일정 처리 약함 (진짜 약점)</a:t>
+                      </a:r>
+                    </a:p>
+                  </a:txBody>
+                  <a:tcPr marL="73152" marR="54864" marT="27432" marB="27432" anchor="ctr">
+                    <a:solidFill>
+                      <a:srgbClr val="F4F6F8"/>
+                    </a:solidFill>
+                  </a:tcPr>
+                </a:tc>
+              </a:tr>
+              <a:tr h="411480">
+                <a:tc>
+                  <a:txBody>
+                    <a:bodyPr wrap="square"/>
+                    <a:lstStyle/>
+                    <a:p>
+                      <a:pPr algn="l"/>
+                      <a:r>
+                        <a:rPr sz="1250" b="0" i="0">
+                          <a:solidFill>
+                            <a:srgbClr val="222222"/>
+                          </a:solidFill>
+                          <a:latin typeface="Noto Sans CJK KR"/>
+                        </a:rPr>
+                        <a:t>의존성 체인</a:t>
+                      </a:r>
+                    </a:p>
+                  </a:txBody>
+                  <a:tcPr marL="73152" marR="54864" marT="27432" marB="27432" anchor="ctr">
+                    <a:solidFill>
+                      <a:srgbClr val="FFFFFF"/>
+                    </a:solidFill>
+                  </a:tcPr>
+                </a:tc>
+                <a:tc>
+                  <a:txBody>
+                    <a:bodyPr wrap="square"/>
+                    <a:lstStyle/>
+                    <a:p>
+                      <a:pPr algn="ctr"/>
+                      <a:r>
+                        <a:rPr sz="1250" b="0" i="0">
+                          <a:solidFill>
+                            <a:srgbClr val="222222"/>
+                          </a:solidFill>
+                          <a:latin typeface="Noto Sans CJK KR"/>
+                        </a:rPr>
+                        <a:t>0/6</a:t>
+                      </a:r>
+                    </a:p>
+                  </a:txBody>
+                  <a:tcPr marL="73152" marR="54864" marT="27432" marB="27432" anchor="ctr">
+                    <a:solidFill>
+                      <a:srgbClr val="FFFFFF"/>
+                    </a:solidFill>
+                  </a:tcPr>
+                </a:tc>
+                <a:tc>
+                  <a:txBody>
+                    <a:bodyPr wrap="square"/>
+                    <a:lstStyle/>
+                    <a:p>
+                      <a:pPr algn="ctr"/>
+                      <a:r>
+                        <a:rPr sz="1250" b="0" i="0">
+                          <a:solidFill>
+                            <a:srgbClr val="222222"/>
+                          </a:solidFill>
+                          <a:latin typeface="Noto Sans CJK KR"/>
+                        </a:rPr>
+                        <a:t>0/6 (0%)</a:t>
+                      </a:r>
+                    </a:p>
+                  </a:txBody>
+                  <a:tcPr marL="73152" marR="54864" marT="27432" marB="27432" anchor="ctr">
+                    <a:solidFill>
+                      <a:srgbClr val="FFFFFF"/>
+                    </a:solidFill>
+                  </a:tcPr>
+                </a:tc>
+                <a:tc>
+                  <a:txBody>
+                    <a:bodyPr wrap="square"/>
+                    <a:lstStyle/>
+                    <a:p>
+                      <a:pPr algn="ctr"/>
+                      <a:r>
+                        <a:rPr sz="1250" b="0" i="0">
+                          <a:solidFill>
+                            <a:srgbClr val="222222"/>
+                          </a:solidFill>
+                          <a:latin typeface="Noto Sans CJK KR"/>
+                        </a:rPr>
+                        <a:t>체인 능력 부재 (전 모델 공통)</a:t>
                       </a:r>
                     </a:p>
                   </a:txBody>
@@ -5664,14 +6296,60 @@
       </p:graphicFrame>
       <p:sp>
         <p:nvSpPr>
+          <p:cNvPr id="8" name="Rectangle 7"/>
+          <p:cNvSpPr/>
+          <p:nvPr/>
+        </p:nvSpPr>
+        <p:spPr>
+          <a:xfrm>
+            <a:off x="457200" y="4617720"/>
+            <a:ext cx="11292840" cy="1554480"/>
+          </a:xfrm>
+          <a:prstGeom prst="rect">
+            <a:avLst/>
+          </a:prstGeom>
+          <a:solidFill>
+            <a:srgbClr val="F4F6F8"/>
+          </a:solidFill>
+          <a:ln w="12700">
+            <a:solidFill>
+              <a:srgbClr val="4C72B0"/>
+            </a:solidFill>
+          </a:ln>
+          <a:effectLst/>
+        </p:spPr>
+        <p:style>
+          <a:lnRef idx="1">
+            <a:schemeClr val="accent1"/>
+          </a:lnRef>
+          <a:fillRef idx="3">
+            <a:schemeClr val="accent1"/>
+          </a:fillRef>
+          <a:effectRef idx="2">
+            <a:schemeClr val="accent1"/>
+          </a:effectRef>
+          <a:fontRef idx="minor">
+            <a:schemeClr val="lt1"/>
+          </a:fontRef>
+        </p:style>
+        <p:txBody>
+          <a:bodyPr rtlCol="0" anchor="ctr"/>
+          <a:lstStyle/>
+          <a:p>
+            <a:pPr algn="ctr"/>
+          </a:p>
+        </p:txBody>
+      </p:sp>
+      <p:sp>
+        <p:nvSpPr>
           <p:cNvPr id="9" name="TextBox 8"/>
           <p:cNvSpPr txBox="1"/>
           <p:nvPr/>
         </p:nvSpPr>
         <p:spPr>
           <a:xfrm>
-            <a:off x="457200" y="5212080"/>
-            <a:ext cx="11247120" cy="914400"/>
+            <a:off x="640080" y="4736592"/>
+            <a:ext cx="10972800" cy="1371600"/>
           </a:xfrm>
           <a:prstGeom prst="rect">
             <a:avLst/>
@@ -5684,31 +6362,47 @@
           </a:bodyPr>
           <a:lstStyle/>
           <a:p>
-            <a:pPr algn="ctr"/>
-            <a:r>
-              <a:rPr sz="1250" b="1" i="1">
-                <a:solidFill>
-                  <a:srgbClr val="1F2D3D"/>
-                </a:solidFill>
-                <a:latin typeface="Noto Sans CJK KR"/>
-              </a:rPr>
-              <a:t>역설: base가 instruct보다 통과율이 높다 (2/6 vs 0/6) — RLHF instruct가 오히려 스키마를 '재해석'</a:t>
-            </a:r>
-          </a:p>
-          <a:p>
-            <a:pPr algn="ctr">
-              <a:spcBef>
+            <a:pPr algn="l">
+              <a:spcAft>
                 <a:spcPts val="400"/>
-              </a:spcBef>
+              </a:spcAft>
             </a:pPr>
             <a:r>
-              <a:rPr sz="1250" b="0" i="0">
+              <a:rPr sz="1300" b="1" i="0">
+                <a:solidFill>
+                  <a:srgbClr val="4C72B0"/>
+                </a:solidFill>
+                <a:latin typeface="Noto Sans CJK KR"/>
+              </a:rPr>
+              <a:t>파인튜닝이 한 일 = 두 종류</a:t>
+            </a:r>
+          </a:p>
+          <a:p>
+            <a:pPr algn="l">
+              <a:spcAft>
+                <a:spcPts val="300"/>
+              </a:spcAft>
+            </a:pPr>
+            <a:r>
+              <a:rPr sz="1200" b="0" i="0">
                 <a:solidFill>
                   <a:srgbClr val="222222"/>
                 </a:solidFill>
                 <a:latin typeface="Noto Sans CJK KR"/>
               </a:rPr>
-              <a:t>→ 파인튜닝은 '없는 추론 주입'이 아니라 '앱이 파싱할 정확한 출력 규격 고정'이 핵심</a:t>
+              <a:t>•  ① 포맷 고정 (즉효) — 리스크·상대날짜는 내용 이미 100%, SFT는 규격만 고정해 0→100%</a:t>
+            </a:r>
+          </a:p>
+          <a:p>
+            <a:pPr algn="l"/>
+            <a:r>
+              <a:rPr sz="1200" b="0" i="0">
+                <a:solidFill>
+                  <a:srgbClr val="222222"/>
+                </a:solidFill>
+                <a:latin typeface="Noto Sans CJK KR"/>
+              </a:rPr>
+              <a:t>•  ② 진짜 추론 보강 — 날짜혼재(22→89%)·당일시각(33→100%)은 SFT가 실제 추론을 가르침</a:t>
             </a:r>
           </a:p>
         </p:txBody>
@@ -5743,7 +6437,7 @@
                 </a:solidFill>
                 <a:latin typeface="Noto Sans CJK KR"/>
               </a:rPr>
-              <a:t>14</a:t>
+              <a:t>15</a:t>
             </a:r>
           </a:p>
         </p:txBody>
@@ -5756,7 +6450,7 @@
 </p:sld>
 </file>
 
-<file path=ppt/slides/slide15.xml><?xml version="1.0" encoding="utf-8"?>
+<file path=ppt/slides/slide16.xml><?xml version="1.0" encoding="utf-8"?>
 <p:sld xmlns:a="http://schemas.openxmlformats.org/drawingml/2006/main" xmlns:p="http://schemas.openxmlformats.org/presentationml/2006/main" xmlns:r="http://schemas.openxmlformats.org/officeDocument/2006/relationships">
   <p:cSld>
     <p:spTree>
@@ -6444,7 +7138,7 @@
                 </a:solidFill>
                 <a:latin typeface="Noto Sans CJK KR"/>
               </a:rPr>
-              <a:t>15</a:t>
+              <a:t>16</a:t>
             </a:r>
           </a:p>
         </p:txBody>
@@ -6457,7 +7151,7 @@
 </p:sld>
 </file>
 
-<file path=ppt/slides/slide16.xml><?xml version="1.0" encoding="utf-8"?>
+<file path=ppt/slides/slide17.xml><?xml version="1.0" encoding="utf-8"?>
 <p:sld xmlns:a="http://schemas.openxmlformats.org/drawingml/2006/main" xmlns:p="http://schemas.openxmlformats.org/presentationml/2006/main" xmlns:r="http://schemas.openxmlformats.org/officeDocument/2006/relationships">
   <p:cSld>
     <p:spTree>

--- a/presentation/TimeSorter_발표자료.pptx
+++ b/presentation/TimeSorter_발표자료.pptx
@@ -10557,7 +10557,7 @@
         </p:nvSpPr>
         <p:spPr>
           <a:xfrm>
-            <a:off x="457200" y="3977639"/>
+            <a:off x="457200" y="3931920"/>
             <a:ext cx="10972800" cy="365760"/>
           </a:xfrm>
           <a:prstGeom prst="rect">
@@ -10579,7 +10579,7 @@
                 </a:solidFill>
                 <a:latin typeface="Noto Sans CJK KR"/>
               </a:rPr>
-              <a:t>DPO rejected 위반 유형 분포 (v5)</a:t>
+              <a:t>DPO 쌍 구성 (v5, 총 1,368쌍)</a:t>
             </a:r>
           </a:p>
         </p:txBody>
@@ -10593,8 +10593,8 @@
           <p:nvPr/>
         </p:nvGraphicFramePr>
         <p:xfrm>
-          <a:off x="457200" y="4389120"/>
-          <a:ext cx="11292840" cy="1737360"/>
+          <a:off x="457200" y="4315968"/>
+          <a:ext cx="11292840" cy="1828800"/>
         </p:xfrm>
         <a:graphic>
           <a:graphicData uri="http://schemas.openxmlformats.org/drawingml/2006/table">
@@ -10607,7 +10607,7 @@
                 <a:gridCol w="1645920"/>
                 <a:gridCol w="5715000"/>
               </a:tblGrid>
-              <a:tr h="289560">
+              <a:tr h="203200">
                 <a:tc>
                   <a:txBody>
                     <a:bodyPr wrap="square"/>
@@ -10678,7 +10678,7 @@
                   </a:tcPr>
                 </a:tc>
               </a:tr>
-              <a:tr h="289560">
+              <a:tr h="203200">
                 <a:tc>
                   <a:txBody>
                     <a:bodyPr wrap="square"/>
@@ -10686,7 +10686,7 @@
                     <a:p>
                       <a:pPr algn="l"/>
                       <a:r>
-                        <a:rPr sz="1200" b="0" i="0">
+                        <a:rPr sz="1100" b="0" i="0">
                           <a:solidFill>
                             <a:srgbClr val="222222"/>
                           </a:solidFill>
@@ -10709,7 +10709,7 @@
                     <a:p>
                       <a:pPr algn="ctr"/>
                       <a:r>
-                        <a:rPr sz="1200" b="0" i="0">
+                        <a:rPr sz="1100" b="0" i="0">
                           <a:solidFill>
                             <a:srgbClr val="222222"/>
                           </a:solidFill>
@@ -10732,7 +10732,7 @@
                     <a:p>
                       <a:pPr algn="ctr"/>
                       <a:r>
-                        <a:rPr sz="1200" b="0" i="0">
+                        <a:rPr sz="1100" b="0" i="0">
                           <a:solidFill>
                             <a:srgbClr val="222222"/>
                           </a:solidFill>
@@ -10749,7 +10749,7 @@
                   </a:tcPr>
                 </a:tc>
               </a:tr>
-              <a:tr h="289560">
+              <a:tr h="203200">
                 <a:tc>
                   <a:txBody>
                     <a:bodyPr wrap="square"/>
@@ -10757,13 +10757,13 @@
                     <a:p>
                       <a:pPr algn="l"/>
                       <a:r>
-                        <a:rPr sz="1200" b="0" i="0">
+                        <a:rPr sz="1100" b="0" i="0">
                           <a:solidFill>
                             <a:srgbClr val="222222"/>
                           </a:solidFill>
                           <a:latin typeface="Noto Sans CJK KR"/>
                         </a:rPr>
-                        <a:t>granularity_swap</a:t>
+                        <a:t>onpolicy</a:t>
                       </a:r>
                     </a:p>
                   </a:txBody>
@@ -10780,13 +10780,13 @@
                     <a:p>
                       <a:pPr algn="ctr"/>
                       <a:r>
-                        <a:rPr sz="1200" b="0" i="0">
+                        <a:rPr sz="1100" b="0" i="0">
                           <a:solidFill>
                             <a:srgbClr val="222222"/>
                           </a:solidFill>
                           <a:latin typeface="Noto Sans CJK KR"/>
                         </a:rPr>
-                        <a:t>220</a:t>
+                        <a:t>228</a:t>
                       </a:r>
                     </a:p>
                   </a:txBody>
@@ -10803,7 +10803,78 @@
                     <a:p>
                       <a:pPr algn="ctr"/>
                       <a:r>
-                        <a:rPr sz="1200" b="0" i="0">
+                        <a:rPr sz="1100" b="0" i="0">
+                          <a:solidFill>
+                            <a:srgbClr val="222222"/>
+                          </a:solidFill>
+                          <a:latin typeface="Noto Sans CJK KR"/>
+                        </a:rPr>
+                        <a:t>SFT 모델이 실제 생성한 오답 (체인 154 등)</a:t>
+                      </a:r>
+                    </a:p>
+                  </a:txBody>
+                  <a:tcPr marL="73152" marR="54864" marT="27432" marB="27432" anchor="ctr">
+                    <a:solidFill>
+                      <a:srgbClr val="F4F6F8"/>
+                    </a:solidFill>
+                  </a:tcPr>
+                </a:tc>
+              </a:tr>
+              <a:tr h="203200">
+                <a:tc>
+                  <a:txBody>
+                    <a:bodyPr wrap="square"/>
+                    <a:lstStyle/>
+                    <a:p>
+                      <a:pPr algn="l"/>
+                      <a:r>
+                        <a:rPr sz="1100" b="0" i="0">
+                          <a:solidFill>
+                            <a:srgbClr val="222222"/>
+                          </a:solidFill>
+                          <a:latin typeface="Noto Sans CJK KR"/>
+                        </a:rPr>
+                        <a:t>granularity_swap</a:t>
+                      </a:r>
+                    </a:p>
+                  </a:txBody>
+                  <a:tcPr marL="73152" marR="54864" marT="27432" marB="27432" anchor="ctr">
+                    <a:solidFill>
+                      <a:srgbClr val="FFFFFF"/>
+                    </a:solidFill>
+                  </a:tcPr>
+                </a:tc>
+                <a:tc>
+                  <a:txBody>
+                    <a:bodyPr wrap="square"/>
+                    <a:lstStyle/>
+                    <a:p>
+                      <a:pPr algn="ctr"/>
+                      <a:r>
+                        <a:rPr sz="1100" b="0" i="0">
+                          <a:solidFill>
+                            <a:srgbClr val="222222"/>
+                          </a:solidFill>
+                          <a:latin typeface="Noto Sans CJK KR"/>
+                        </a:rPr>
+                        <a:t>220</a:t>
+                      </a:r>
+                    </a:p>
+                  </a:txBody>
+                  <a:tcPr marL="73152" marR="54864" marT="27432" marB="27432" anchor="ctr">
+                    <a:solidFill>
+                      <a:srgbClr val="FFFFFF"/>
+                    </a:solidFill>
+                  </a:tcPr>
+                </a:tc>
+                <a:tc>
+                  <a:txBody>
+                    <a:bodyPr wrap="square"/>
+                    <a:lstStyle/>
+                    <a:p>
+                      <a:pPr algn="ctr"/>
+                      <a:r>
+                        <a:rPr sz="1100" b="0" i="0">
                           <a:solidFill>
                             <a:srgbClr val="222222"/>
                           </a:solidFill>
@@ -10815,12 +10886,12 @@
                   </a:txBody>
                   <a:tcPr marL="73152" marR="54864" marT="27432" marB="27432" anchor="ctr">
                     <a:solidFill>
-                      <a:srgbClr val="F4F6F8"/>
+                      <a:srgbClr val="FFFFFF"/>
                     </a:solidFill>
                   </a:tcPr>
                 </a:tc>
               </a:tr>
-              <a:tr h="289560">
+              <a:tr h="203200">
                 <a:tc>
                   <a:txBody>
                     <a:bodyPr wrap="square"/>
@@ -10828,7 +10899,78 @@
                     <a:p>
                       <a:pPr algn="l"/>
                       <a:r>
-                        <a:rPr sz="1200" b="0" i="0">
+                        <a:rPr sz="1100" b="0" i="0">
+                          <a:solidFill>
+                            <a:srgbClr val="222222"/>
+                          </a:solidFill>
+                          <a:latin typeface="Noto Sans CJK KR"/>
+                        </a:rPr>
+                        <a:t>dependency_scatter</a:t>
+                      </a:r>
+                    </a:p>
+                  </a:txBody>
+                  <a:tcPr marL="73152" marR="54864" marT="27432" marB="27432" anchor="ctr">
+                    <a:solidFill>
+                      <a:srgbClr val="F4F6F8"/>
+                    </a:solidFill>
+                  </a:tcPr>
+                </a:tc>
+                <a:tc>
+                  <a:txBody>
+                    <a:bodyPr wrap="square"/>
+                    <a:lstStyle/>
+                    <a:p>
+                      <a:pPr algn="ctr"/>
+                      <a:r>
+                        <a:rPr sz="1100" b="0" i="0">
+                          <a:solidFill>
+                            <a:srgbClr val="222222"/>
+                          </a:solidFill>
+                          <a:latin typeface="Noto Sans CJK KR"/>
+                        </a:rPr>
+                        <a:t>185</a:t>
+                      </a:r>
+                    </a:p>
+                  </a:txBody>
+                  <a:tcPr marL="73152" marR="54864" marT="27432" marB="27432" anchor="ctr">
+                    <a:solidFill>
+                      <a:srgbClr val="F4F6F8"/>
+                    </a:solidFill>
+                  </a:tcPr>
+                </a:tc>
+                <a:tc>
+                  <a:txBody>
+                    <a:bodyPr wrap="square"/>
+                    <a:lstStyle/>
+                    <a:p>
+                      <a:pPr algn="ctr"/>
+                      <a:r>
+                        <a:rPr sz="1100" b="0" i="0">
+                          <a:solidFill>
+                            <a:srgbClr val="222222"/>
+                          </a:solidFill>
+                          <a:latin typeface="Noto Sans CJK KR"/>
+                        </a:rPr>
+                        <a:t>의존성 체인을 분산 배치</a:t>
+                      </a:r>
+                    </a:p>
+                  </a:txBody>
+                  <a:tcPr marL="73152" marR="54864" marT="27432" marB="27432" anchor="ctr">
+                    <a:solidFill>
+                      <a:srgbClr val="F4F6F8"/>
+                    </a:solidFill>
+                  </a:tcPr>
+                </a:tc>
+              </a:tr>
+              <a:tr h="203200">
+                <a:tc>
+                  <a:txBody>
+                    <a:bodyPr wrap="square"/>
+                    <a:lstStyle/>
+                    <a:p>
+                      <a:pPr algn="l"/>
+                      <a:r>
+                        <a:rPr sz="1100" b="0" i="0">
                           <a:solidFill>
                             <a:srgbClr val="222222"/>
                           </a:solidFill>
@@ -10851,7 +10993,7 @@
                     <a:p>
                       <a:pPr algn="ctr"/>
                       <a:r>
-                        <a:rPr sz="1200" b="0" i="0">
+                        <a:rPr sz="1100" b="0" i="0">
                           <a:solidFill>
                             <a:srgbClr val="222222"/>
                           </a:solidFill>
@@ -10874,7 +11016,7 @@
                     <a:p>
                       <a:pPr algn="ctr"/>
                       <a:r>
-                        <a:rPr sz="1200" b="0" i="0">
+                        <a:rPr sz="1100" b="0" i="0">
                           <a:solidFill>
                             <a:srgbClr val="222222"/>
                           </a:solidFill>
@@ -10891,7 +11033,7 @@
                   </a:tcPr>
                 </a:tc>
               </a:tr>
-              <a:tr h="289560">
+              <a:tr h="203200">
                 <a:tc>
                   <a:txBody>
                     <a:bodyPr wrap="square"/>
@@ -10899,13 +11041,13 @@
                     <a:p>
                       <a:pPr algn="l"/>
                       <a:r>
-                        <a:rPr sz="1200" b="0" i="0">
+                        <a:rPr sz="1100" b="0" i="0">
                           <a:solidFill>
                             <a:srgbClr val="222222"/>
                           </a:solidFill>
                           <a:latin typeface="Noto Sans CJK KR"/>
                         </a:rPr>
-                        <a:t>dependency_scatter</a:t>
+                        <a:t>risk_ignore / past_hallucination</a:t>
                       </a:r>
                     </a:p>
                   </a:txBody>
@@ -10922,13 +11064,13 @@
                     <a:p>
                       <a:pPr algn="ctr"/>
                       <a:r>
-                        <a:rPr sz="1200" b="0" i="0">
+                        <a:rPr sz="1100" b="0" i="0">
                           <a:solidFill>
                             <a:srgbClr val="222222"/>
                           </a:solidFill>
                           <a:latin typeface="Noto Sans CJK KR"/>
                         </a:rPr>
-                        <a:t>185</a:t>
+                        <a:t>92 / 36</a:t>
                       </a:r>
                     </a:p>
                   </a:txBody>
@@ -10945,13 +11087,13 @@
                     <a:p>
                       <a:pPr algn="ctr"/>
                       <a:r>
-                        <a:rPr sz="1200" b="0" i="0">
+                        <a:rPr sz="1100" b="0" i="0">
                           <a:solidFill>
                             <a:srgbClr val="222222"/>
                           </a:solidFill>
                           <a:latin typeface="Noto Sans CJK KR"/>
                         </a:rPr>
-                        <a:t>의존성 체인을 분산 배치</a:t>
+                        <a:t>리스크 미반영 / 지남 단정</a:t>
                       </a:r>
                     </a:p>
                   </a:txBody>
@@ -10962,7 +11104,7 @@
                   </a:tcPr>
                 </a:tc>
               </a:tr>
-              <a:tr h="289560">
+              <a:tr h="203200">
                 <a:tc>
                   <a:txBody>
                     <a:bodyPr wrap="square"/>
@@ -10970,13 +11112,13 @@
                     <a:p>
                       <a:pPr algn="l"/>
                       <a:r>
-                        <a:rPr sz="1200" b="0" i="0">
+                        <a:rPr sz="1100" b="0" i="0">
                           <a:solidFill>
                             <a:srgbClr val="222222"/>
                           </a:solidFill>
                           <a:latin typeface="Noto Sans CJK KR"/>
                         </a:rPr>
-                        <a:t>risk_ignore / past_hallucination</a:t>
+                        <a:t>refusal (거절 쌍)</a:t>
                       </a:r>
                     </a:p>
                   </a:txBody>
@@ -10993,13 +11135,13 @@
                     <a:p>
                       <a:pPr algn="ctr"/>
                       <a:r>
-                        <a:rPr sz="1200" b="0" i="0">
+                        <a:rPr sz="1100" b="0" i="0">
                           <a:solidFill>
                             <a:srgbClr val="222222"/>
                           </a:solidFill>
                           <a:latin typeface="Noto Sans CJK KR"/>
                         </a:rPr>
-                        <a:t>92 / 36</a:t>
+                        <a:t>200</a:t>
                       </a:r>
                     </a:p>
                   </a:txBody>
@@ -11016,19 +11158,90 @@
                     <a:p>
                       <a:pPr algn="ctr"/>
                       <a:r>
-                        <a:rPr sz="1200" b="0" i="0">
+                        <a:rPr sz="1100" b="0" i="0">
                           <a:solidFill>
                             <a:srgbClr val="222222"/>
                           </a:solidFill>
                           <a:latin typeface="Noto Sans CJK KR"/>
                         </a:rPr>
-                        <a:t>리스크 미반영 / 지남 단정</a:t>
+                        <a:t>비일정 입력 거절 학습</a:t>
                       </a:r>
                     </a:p>
                   </a:txBody>
                   <a:tcPr marL="73152" marR="54864" marT="27432" marB="27432" anchor="ctr">
                     <a:solidFill>
                       <a:srgbClr val="FFFFFF"/>
+                    </a:solidFill>
+                  </a:tcPr>
+                </a:tc>
+              </a:tr>
+              <a:tr h="203200">
+                <a:tc>
+                  <a:txBody>
+                    <a:bodyPr wrap="square"/>
+                    <a:lstStyle/>
+                    <a:p>
+                      <a:pPr algn="l"/>
+                      <a:r>
+                        <a:rPr sz="1100" b="0" i="0">
+                          <a:solidFill>
+                            <a:srgbClr val="222222"/>
+                          </a:solidFill>
+                          <a:latin typeface="Noto Sans CJK KR"/>
+                        </a:rPr>
+                        <a:t>합계</a:t>
+                      </a:r>
+                    </a:p>
+                  </a:txBody>
+                  <a:tcPr marL="73152" marR="54864" marT="27432" marB="27432" anchor="ctr">
+                    <a:solidFill>
+                      <a:srgbClr val="F4F6F8"/>
+                    </a:solidFill>
+                  </a:tcPr>
+                </a:tc>
+                <a:tc>
+                  <a:txBody>
+                    <a:bodyPr wrap="square"/>
+                    <a:lstStyle/>
+                    <a:p>
+                      <a:pPr algn="ctr"/>
+                      <a:r>
+                        <a:rPr sz="1100" b="0" i="0">
+                          <a:solidFill>
+                            <a:srgbClr val="222222"/>
+                          </a:solidFill>
+                          <a:latin typeface="Noto Sans CJK KR"/>
+                        </a:rPr>
+                        <a:t>1,368</a:t>
+                      </a:r>
+                    </a:p>
+                  </a:txBody>
+                  <a:tcPr marL="73152" marR="54864" marT="27432" marB="27432" anchor="ctr">
+                    <a:solidFill>
+                      <a:srgbClr val="F4F6F8"/>
+                    </a:solidFill>
+                  </a:tcPr>
+                </a:tc>
+                <a:tc>
+                  <a:txBody>
+                    <a:bodyPr wrap="square"/>
+                    <a:lstStyle/>
+                    <a:p>
+                      <a:pPr algn="ctr"/>
+                      <a:r>
+                        <a:rPr sz="1100" b="0" i="0">
+                          <a:solidFill>
+                            <a:srgbClr val="222222"/>
+                          </a:solidFill>
+                          <a:latin typeface="Noto Sans CJK KR"/>
+                        </a:rPr>
+                        <a:t>—</a:t>
+                      </a:r>
+                    </a:p>
+                  </a:txBody>
+                  <a:tcPr marL="73152" marR="54864" marT="27432" marB="27432" anchor="ctr">
+                    <a:solidFill>
+                      <a:srgbClr val="F4F6F8"/>
                     </a:solidFill>
                   </a:tcPr>
                 </a:tc>

--- a/presentation/TimeSorter_발표자료.pptx
+++ b/presentation/TimeSorter_발표자료.pptx
@@ -22,6 +22,7 @@
     <p:sldId id="270" r:id="rId21"/>
     <p:sldId id="271" r:id="rId22"/>
     <p:sldId id="272" r:id="rId23"/>
+    <p:sldId id="273" r:id="rId24"/>
   </p:sldIdLst>
   <p:sldSz cx="12191695" cy="6858000" type="screen4x3"/>
   <p:notesSz cx="6858000" cy="9144000"/>
@@ -4167,6 +4168,292 @@
 </file>
 
 <file path=ppt/slides/slide13.xml><?xml version="1.0" encoding="utf-8"?>
+<p:sld xmlns:a="http://schemas.openxmlformats.org/drawingml/2006/main" xmlns:p="http://schemas.openxmlformats.org/presentationml/2006/main" xmlns:r="http://schemas.openxmlformats.org/officeDocument/2006/relationships">
+  <p:cSld>
+    <p:spTree>
+      <p:nvGrpSpPr>
+        <p:cNvPr id="1" name=""/>
+        <p:cNvGrpSpPr/>
+        <p:nvPr/>
+      </p:nvGrpSpPr>
+      <p:grpSpPr/>
+      <p:sp>
+        <p:nvSpPr>
+          <p:cNvPr id="2" name="Rectangle 1"/>
+          <p:cNvSpPr/>
+          <p:nvPr/>
+        </p:nvSpPr>
+        <p:spPr>
+          <a:xfrm>
+            <a:off x="0" y="0"/>
+            <a:ext cx="12191695" cy="1051560"/>
+          </a:xfrm>
+          <a:prstGeom prst="rect">
+            <a:avLst/>
+          </a:prstGeom>
+          <a:solidFill>
+            <a:srgbClr val="1F2D3D"/>
+          </a:solidFill>
+          <a:ln>
+            <a:noFill/>
+          </a:ln>
+          <a:effectLst/>
+        </p:spPr>
+        <p:style>
+          <a:lnRef idx="1">
+            <a:schemeClr val="accent1"/>
+          </a:lnRef>
+          <a:fillRef idx="3">
+            <a:schemeClr val="accent1"/>
+          </a:fillRef>
+          <a:effectRef idx="2">
+            <a:schemeClr val="accent1"/>
+          </a:effectRef>
+          <a:fontRef idx="minor">
+            <a:schemeClr val="lt1"/>
+          </a:fontRef>
+        </p:style>
+        <p:txBody>
+          <a:bodyPr rtlCol="0" anchor="ctr"/>
+          <a:lstStyle/>
+          <a:p>
+            <a:pPr algn="ctr"/>
+          </a:p>
+        </p:txBody>
+      </p:sp>
+      <p:sp>
+        <p:nvSpPr>
+          <p:cNvPr id="3" name="Rectangle 2"/>
+          <p:cNvSpPr/>
+          <p:nvPr/>
+        </p:nvSpPr>
+        <p:spPr>
+          <a:xfrm>
+            <a:off x="0" y="1051560"/>
+            <a:ext cx="12191695" cy="38100"/>
+          </a:xfrm>
+          <a:prstGeom prst="rect">
+            <a:avLst/>
+          </a:prstGeom>
+          <a:solidFill>
+            <a:srgbClr val="DD8452"/>
+          </a:solidFill>
+          <a:ln>
+            <a:noFill/>
+          </a:ln>
+          <a:effectLst/>
+        </p:spPr>
+        <p:style>
+          <a:lnRef idx="1">
+            <a:schemeClr val="accent1"/>
+          </a:lnRef>
+          <a:fillRef idx="3">
+            <a:schemeClr val="accent1"/>
+          </a:fillRef>
+          <a:effectRef idx="2">
+            <a:schemeClr val="accent1"/>
+          </a:effectRef>
+          <a:fontRef idx="minor">
+            <a:schemeClr val="lt1"/>
+          </a:fontRef>
+        </p:style>
+        <p:txBody>
+          <a:bodyPr rtlCol="0" anchor="ctr"/>
+          <a:lstStyle/>
+          <a:p>
+            <a:pPr algn="ctr"/>
+          </a:p>
+        </p:txBody>
+      </p:sp>
+      <p:sp>
+        <p:nvSpPr>
+          <p:cNvPr id="4" name="TextBox 3"/>
+          <p:cNvSpPr txBox="1"/>
+          <p:nvPr/>
+        </p:nvSpPr>
+        <p:spPr>
+          <a:xfrm>
+            <a:off x="457200" y="128016"/>
+            <a:ext cx="10972800" cy="320040"/>
+          </a:xfrm>
+          <a:prstGeom prst="rect">
+            <a:avLst/>
+          </a:prstGeom>
+          <a:noFill/>
+        </p:spPr>
+        <p:txBody>
+          <a:bodyPr wrap="square" anchor="t">
+            <a:spAutoFit/>
+          </a:bodyPr>
+          <a:lstStyle/>
+          <a:p>
+            <a:pPr algn="l"/>
+            <a:r>
+              <a:rPr sz="1200" b="1" i="0">
+                <a:solidFill>
+                  <a:srgbClr val="DD8452"/>
+                </a:solidFill>
+                <a:latin typeface="Noto Sans CJK KR"/>
+              </a:rPr>
+              <a:t>RESULTS</a:t>
+            </a:r>
+          </a:p>
+        </p:txBody>
+      </p:sp>
+      <p:sp>
+        <p:nvSpPr>
+          <p:cNvPr id="5" name="TextBox 4"/>
+          <p:cNvSpPr txBox="1"/>
+          <p:nvPr/>
+        </p:nvSpPr>
+        <p:spPr>
+          <a:xfrm>
+            <a:off x="457200" y="384048"/>
+            <a:ext cx="11247120" cy="594360"/>
+          </a:xfrm>
+          <a:prstGeom prst="rect">
+            <a:avLst/>
+          </a:prstGeom>
+          <a:noFill/>
+        </p:spPr>
+        <p:txBody>
+          <a:bodyPr wrap="square" anchor="t">
+            <a:spAutoFit/>
+          </a:bodyPr>
+          <a:lstStyle/>
+          <a:p>
+            <a:pPr algn="l"/>
+            <a:r>
+              <a:rPr sz="2600" b="1" i="0">
+                <a:solidFill>
+                  <a:srgbClr val="FFFFFF"/>
+                </a:solidFill>
+                <a:latin typeface="Noto Sans CJK KR"/>
+              </a:rPr>
+              <a:t>모델 크기 효과 — Qwen3.5 4B vs 9B</a:t>
+            </a:r>
+          </a:p>
+        </p:txBody>
+      </p:sp>
+      <p:pic>
+        <p:nvPicPr>
+          <p:cNvPr id="6" name="Picture 5" descr="chart_4b_vs_9b.png"/>
+          <p:cNvPicPr>
+            <a:picLocks noChangeAspect="1"/>
+          </p:cNvPicPr>
+          <p:nvPr/>
+        </p:nvPicPr>
+        <p:blipFill>
+          <a:blip r:embed="rId2"/>
+          <a:stretch>
+            <a:fillRect/>
+          </a:stretch>
+        </p:blipFill>
+        <p:spPr>
+          <a:xfrm>
+            <a:off x="1045083" y="1325880"/>
+            <a:ext cx="10117074" cy="4114800"/>
+          </a:xfrm>
+          <a:prstGeom prst="rect">
+            <a:avLst/>
+          </a:prstGeom>
+        </p:spPr>
+      </p:pic>
+      <p:sp>
+        <p:nvSpPr>
+          <p:cNvPr id="7" name="TextBox 6"/>
+          <p:cNvSpPr txBox="1"/>
+          <p:nvPr/>
+        </p:nvSpPr>
+        <p:spPr>
+          <a:xfrm>
+            <a:off x="457200" y="5577840"/>
+            <a:ext cx="11247120" cy="914400"/>
+          </a:xfrm>
+          <a:prstGeom prst="rect">
+            <a:avLst/>
+          </a:prstGeom>
+          <a:noFill/>
+        </p:spPr>
+        <p:txBody>
+          <a:bodyPr wrap="square" anchor="t">
+            <a:spAutoFit/>
+          </a:bodyPr>
+          <a:lstStyle/>
+          <a:p>
+            <a:pPr algn="ctr"/>
+            <a:r>
+              <a:rPr sz="1300" b="1" i="0">
+                <a:solidFill>
+                  <a:srgbClr val="1F2D3D"/>
+                </a:solidFill>
+                <a:latin typeface="Noto Sans CJK KR"/>
+              </a:rPr>
+              <a:t>9B(2.3× 크기, RTX 4090, n=150)은 리스크 80→95% 등 약점을 평준화하나, 의존성 체인은 57%로 여전히 최대 약점</a:t>
+            </a:r>
+          </a:p>
+          <a:p>
+            <a:pPr algn="ctr">
+              <a:spcBef>
+                <a:spcPts val="300"/>
+              </a:spcBef>
+            </a:pPr>
+            <a:r>
+              <a:rPr sz="1100" b="0" i="1">
+                <a:solidFill>
+                  <a:srgbClr val="5A5A5A"/>
+                </a:solidFill>
+                <a:latin typeface="Noto Sans CJK KR"/>
+              </a:rPr>
+              <a:t>→ 체인은 모델 크기가 아니라 SFT 데이터 보강이 필요한 문제 (4B n=30·9B n=150, 표본차 감안)</a:t>
+            </a:r>
+          </a:p>
+        </p:txBody>
+      </p:sp>
+      <p:sp>
+        <p:nvSpPr>
+          <p:cNvPr id="8" name="TextBox 7"/>
+          <p:cNvSpPr txBox="1"/>
+          <p:nvPr/>
+        </p:nvSpPr>
+        <p:spPr>
+          <a:xfrm>
+            <a:off x="10789920" y="6446520"/>
+            <a:ext cx="1280160" cy="320040"/>
+          </a:xfrm>
+          <a:prstGeom prst="rect">
+            <a:avLst/>
+          </a:prstGeom>
+          <a:noFill/>
+        </p:spPr>
+        <p:txBody>
+          <a:bodyPr wrap="square" anchor="t">
+            <a:spAutoFit/>
+          </a:bodyPr>
+          <a:lstStyle/>
+          <a:p>
+            <a:pPr algn="r"/>
+            <a:r>
+              <a:rPr sz="1000" b="0" i="0">
+                <a:solidFill>
+                  <a:srgbClr val="5A5A5A"/>
+                </a:solidFill>
+                <a:latin typeface="Noto Sans CJK KR"/>
+              </a:rPr>
+              <a:t>13</a:t>
+            </a:r>
+          </a:p>
+        </p:txBody>
+      </p:sp>
+    </p:spTree>
+  </p:cSld>
+  <p:clrMapOvr>
+    <a:masterClrMapping/>
+  </p:clrMapOvr>
+</p:sld>
+</file>
+
+<file path=ppt/slides/slide14.xml><?xml version="1.0" encoding="utf-8"?>
 <p:sld xmlns:a="http://schemas.openxmlformats.org/drawingml/2006/main" xmlns:p="http://schemas.openxmlformats.org/presentationml/2006/main" xmlns:r="http://schemas.openxmlformats.org/officeDocument/2006/relationships">
   <p:cSld>
     <p:spTree>
@@ -5074,7 +5361,7 @@
                 </a:solidFill>
                 <a:latin typeface="Noto Sans CJK KR"/>
               </a:rPr>
-              <a:t>13</a:t>
+              <a:t>14</a:t>
             </a:r>
           </a:p>
         </p:txBody>
@@ -5087,7 +5374,7 @@
 </p:sld>
 </file>
 
-<file path=ppt/slides/slide14.xml><?xml version="1.0" encoding="utf-8"?>
+<file path=ppt/slides/slide15.xml><?xml version="1.0" encoding="utf-8"?>
 <p:sld xmlns:a="http://schemas.openxmlformats.org/drawingml/2006/main" xmlns:p="http://schemas.openxmlformats.org/presentationml/2006/main" xmlns:r="http://schemas.openxmlformats.org/officeDocument/2006/relationships">
   <p:cSld>
     <p:spTree>
@@ -5486,7 +5773,7 @@
                 </a:solidFill>
                 <a:latin typeface="Noto Sans CJK KR"/>
               </a:rPr>
-              <a:t>14</a:t>
+              <a:t>15</a:t>
             </a:r>
           </a:p>
         </p:txBody>
@@ -5499,7 +5786,7 @@
 </p:sld>
 </file>
 
-<file path=ppt/slides/slide15.xml><?xml version="1.0" encoding="utf-8"?>
+<file path=ppt/slides/slide16.xml><?xml version="1.0" encoding="utf-8"?>
 <p:sld xmlns:a="http://schemas.openxmlformats.org/drawingml/2006/main" xmlns:p="http://schemas.openxmlformats.org/presentationml/2006/main" xmlns:r="http://schemas.openxmlformats.org/officeDocument/2006/relationships">
   <p:cSld>
     <p:spTree>
@@ -6437,7 +6724,7 @@
                 </a:solidFill>
                 <a:latin typeface="Noto Sans CJK KR"/>
               </a:rPr>
-              <a:t>15</a:t>
+              <a:t>16</a:t>
             </a:r>
           </a:p>
         </p:txBody>
@@ -6450,7 +6737,7 @@
 </p:sld>
 </file>
 
-<file path=ppt/slides/slide16.xml><?xml version="1.0" encoding="utf-8"?>
+<file path=ppt/slides/slide17.xml><?xml version="1.0" encoding="utf-8"?>
 <p:sld xmlns:a="http://schemas.openxmlformats.org/drawingml/2006/main" xmlns:p="http://schemas.openxmlformats.org/presentationml/2006/main" xmlns:r="http://schemas.openxmlformats.org/officeDocument/2006/relationships">
   <p:cSld>
     <p:spTree>
@@ -7138,7 +7425,7 @@
                 </a:solidFill>
                 <a:latin typeface="Noto Sans CJK KR"/>
               </a:rPr>
-              <a:t>16</a:t>
+              <a:t>17</a:t>
             </a:r>
           </a:p>
         </p:txBody>
@@ -7151,7 +7438,7 @@
 </p:sld>
 </file>
 
-<file path=ppt/slides/slide17.xml><?xml version="1.0" encoding="utf-8"?>
+<file path=ppt/slides/slide18.xml><?xml version="1.0" encoding="utf-8"?>
 <p:sld xmlns:a="http://schemas.openxmlformats.org/drawingml/2006/main" xmlns:p="http://schemas.openxmlformats.org/presentationml/2006/main" xmlns:r="http://schemas.openxmlformats.org/officeDocument/2006/relationships">
   <p:cSld>
     <p:spTree>

--- a/presentation/TimeSorter_발표자료.pptx
+++ b/presentation/TimeSorter_발표자료.pptx
@@ -23,6 +23,7 @@
     <p:sldId id="271" r:id="rId22"/>
     <p:sldId id="272" r:id="rId23"/>
     <p:sldId id="273" r:id="rId24"/>
+    <p:sldId id="274" r:id="rId25"/>
   </p:sldIdLst>
   <p:sldSz cx="12191695" cy="6858000" type="screen4x3"/>
   <p:notesSz cx="6858000" cy="9144000"/>
@@ -4454,6 +4455,292 @@
 </file>
 
 <file path=ppt/slides/slide14.xml><?xml version="1.0" encoding="utf-8"?>
+<p:sld xmlns:a="http://schemas.openxmlformats.org/drawingml/2006/main" xmlns:p="http://schemas.openxmlformats.org/presentationml/2006/main" xmlns:r="http://schemas.openxmlformats.org/officeDocument/2006/relationships">
+  <p:cSld>
+    <p:spTree>
+      <p:nvGrpSpPr>
+        <p:cNvPr id="1" name=""/>
+        <p:cNvGrpSpPr/>
+        <p:nvPr/>
+      </p:nvGrpSpPr>
+      <p:grpSpPr/>
+      <p:sp>
+        <p:nvSpPr>
+          <p:cNvPr id="2" name="Rectangle 1"/>
+          <p:cNvSpPr/>
+          <p:nvPr/>
+        </p:nvSpPr>
+        <p:spPr>
+          <a:xfrm>
+            <a:off x="0" y="0"/>
+            <a:ext cx="12191695" cy="1051560"/>
+          </a:xfrm>
+          <a:prstGeom prst="rect">
+            <a:avLst/>
+          </a:prstGeom>
+          <a:solidFill>
+            <a:srgbClr val="1F2D3D"/>
+          </a:solidFill>
+          <a:ln>
+            <a:noFill/>
+          </a:ln>
+          <a:effectLst/>
+        </p:spPr>
+        <p:style>
+          <a:lnRef idx="1">
+            <a:schemeClr val="accent1"/>
+          </a:lnRef>
+          <a:fillRef idx="3">
+            <a:schemeClr val="accent1"/>
+          </a:fillRef>
+          <a:effectRef idx="2">
+            <a:schemeClr val="accent1"/>
+          </a:effectRef>
+          <a:fontRef idx="minor">
+            <a:schemeClr val="lt1"/>
+          </a:fontRef>
+        </p:style>
+        <p:txBody>
+          <a:bodyPr rtlCol="0" anchor="ctr"/>
+          <a:lstStyle/>
+          <a:p>
+            <a:pPr algn="ctr"/>
+          </a:p>
+        </p:txBody>
+      </p:sp>
+      <p:sp>
+        <p:nvSpPr>
+          <p:cNvPr id="3" name="Rectangle 2"/>
+          <p:cNvSpPr/>
+          <p:nvPr/>
+        </p:nvSpPr>
+        <p:spPr>
+          <a:xfrm>
+            <a:off x="0" y="1051560"/>
+            <a:ext cx="12191695" cy="38100"/>
+          </a:xfrm>
+          <a:prstGeom prst="rect">
+            <a:avLst/>
+          </a:prstGeom>
+          <a:solidFill>
+            <a:srgbClr val="DD8452"/>
+          </a:solidFill>
+          <a:ln>
+            <a:noFill/>
+          </a:ln>
+          <a:effectLst/>
+        </p:spPr>
+        <p:style>
+          <a:lnRef idx="1">
+            <a:schemeClr val="accent1"/>
+          </a:lnRef>
+          <a:fillRef idx="3">
+            <a:schemeClr val="accent1"/>
+          </a:fillRef>
+          <a:effectRef idx="2">
+            <a:schemeClr val="accent1"/>
+          </a:effectRef>
+          <a:fontRef idx="minor">
+            <a:schemeClr val="lt1"/>
+          </a:fontRef>
+        </p:style>
+        <p:txBody>
+          <a:bodyPr rtlCol="0" anchor="ctr"/>
+          <a:lstStyle/>
+          <a:p>
+            <a:pPr algn="ctr"/>
+          </a:p>
+        </p:txBody>
+      </p:sp>
+      <p:sp>
+        <p:nvSpPr>
+          <p:cNvPr id="4" name="TextBox 3"/>
+          <p:cNvSpPr txBox="1"/>
+          <p:nvPr/>
+        </p:nvSpPr>
+        <p:spPr>
+          <a:xfrm>
+            <a:off x="457200" y="128016"/>
+            <a:ext cx="10972800" cy="320040"/>
+          </a:xfrm>
+          <a:prstGeom prst="rect">
+            <a:avLst/>
+          </a:prstGeom>
+          <a:noFill/>
+        </p:spPr>
+        <p:txBody>
+          <a:bodyPr wrap="square" anchor="t">
+            <a:spAutoFit/>
+          </a:bodyPr>
+          <a:lstStyle/>
+          <a:p>
+            <a:pPr algn="l"/>
+            <a:r>
+              <a:rPr sz="1200" b="1" i="0">
+                <a:solidFill>
+                  <a:srgbClr val="DD8452"/>
+                </a:solidFill>
+                <a:latin typeface="Noto Sans CJK KR"/>
+              </a:rPr>
+              <a:t>RESULTS</a:t>
+            </a:r>
+          </a:p>
+        </p:txBody>
+      </p:sp>
+      <p:sp>
+        <p:nvSpPr>
+          <p:cNvPr id="5" name="TextBox 4"/>
+          <p:cNvSpPr txBox="1"/>
+          <p:nvPr/>
+        </p:nvSpPr>
+        <p:spPr>
+          <a:xfrm>
+            <a:off x="457200" y="384048"/>
+            <a:ext cx="11247120" cy="594360"/>
+          </a:xfrm>
+          <a:prstGeom prst="rect">
+            <a:avLst/>
+          </a:prstGeom>
+          <a:noFill/>
+        </p:spPr>
+        <p:txBody>
+          <a:bodyPr wrap="square" anchor="t">
+            <a:spAutoFit/>
+          </a:bodyPr>
+          <a:lstStyle/>
+          <a:p>
+            <a:pPr algn="l"/>
+            <a:r>
+              <a:rPr sz="2600" b="1" i="0">
+                <a:solidFill>
+                  <a:srgbClr val="FFFFFF"/>
+                </a:solidFill>
+                <a:latin typeface="Noto Sans CJK KR"/>
+              </a:rPr>
+              <a:t>Qwen3.5-9B 4-way — 포맷 vs 추론 (n=30)</a:t>
+            </a:r>
+          </a:p>
+        </p:txBody>
+      </p:sp>
+      <p:pic>
+        <p:nvPicPr>
+          <p:cNvPr id="6" name="Picture 5" descr="chart_9b_schema_vs_content.png"/>
+          <p:cNvPicPr>
+            <a:picLocks noChangeAspect="1"/>
+          </p:cNvPicPr>
+          <p:nvPr/>
+        </p:nvPicPr>
+        <p:blipFill>
+          <a:blip r:embed="rId2"/>
+          <a:stretch>
+            <a:fillRect/>
+          </a:stretch>
+        </p:blipFill>
+        <p:spPr>
+          <a:xfrm>
+            <a:off x="2175151" y="1325880"/>
+            <a:ext cx="7856938" cy="4206240"/>
+          </a:xfrm>
+          <a:prstGeom prst="rect">
+            <a:avLst/>
+          </a:prstGeom>
+        </p:spPr>
+      </p:pic>
+      <p:sp>
+        <p:nvSpPr>
+          <p:cNvPr id="7" name="TextBox 6"/>
+          <p:cNvSpPr txBox="1"/>
+          <p:nvPr/>
+        </p:nvSpPr>
+        <p:spPr>
+          <a:xfrm>
+            <a:off x="457200" y="5669280"/>
+            <a:ext cx="11247120" cy="822960"/>
+          </a:xfrm>
+          <a:prstGeom prst="rect">
+            <a:avLst/>
+          </a:prstGeom>
+          <a:noFill/>
+        </p:spPr>
+        <p:txBody>
+          <a:bodyPr wrap="square" anchor="t">
+            <a:spAutoFit/>
+          </a:bodyPr>
+          <a:lstStyle/>
+          <a:p>
+            <a:pPr algn="ctr"/>
+            <a:r>
+              <a:rPr sz="1300" b="1" i="0">
+                <a:solidFill>
+                  <a:srgbClr val="1F2D3D"/>
+                </a:solidFill>
+                <a:latin typeface="Noto Sans CJK KR"/>
+              </a:rPr>
+              <a:t>9B도 4B와 동일 패턴 — no-adapter 스키마 0%지만 내용 46.7%(포맷만 미준수), SFT가 93.3%로 고정</a:t>
+            </a:r>
+          </a:p>
+          <a:p>
+            <a:pPr algn="ctr">
+              <a:spcBef>
+                <a:spcPts val="300"/>
+              </a:spcBef>
+            </a:pPr>
+            <a:r>
+              <a:rPr sz="1100" b="0" i="1">
+                <a:solidFill>
+                  <a:srgbClr val="5A5A5A"/>
+                </a:solidFill>
+                <a:latin typeface="Noto Sans CJK KR"/>
+              </a:rPr>
+              <a:t>SFT=DPO 완전 동일(체인 4/6 고착) — 9B에서도 DPO가 체인을 못 옮김</a:t>
+            </a:r>
+          </a:p>
+        </p:txBody>
+      </p:sp>
+      <p:sp>
+        <p:nvSpPr>
+          <p:cNvPr id="8" name="TextBox 7"/>
+          <p:cNvSpPr txBox="1"/>
+          <p:nvPr/>
+        </p:nvSpPr>
+        <p:spPr>
+          <a:xfrm>
+            <a:off x="10789920" y="6446520"/>
+            <a:ext cx="1280160" cy="320040"/>
+          </a:xfrm>
+          <a:prstGeom prst="rect">
+            <a:avLst/>
+          </a:prstGeom>
+          <a:noFill/>
+        </p:spPr>
+        <p:txBody>
+          <a:bodyPr wrap="square" anchor="t">
+            <a:spAutoFit/>
+          </a:bodyPr>
+          <a:lstStyle/>
+          <a:p>
+            <a:pPr algn="r"/>
+            <a:r>
+              <a:rPr sz="1000" b="0" i="0">
+                <a:solidFill>
+                  <a:srgbClr val="5A5A5A"/>
+                </a:solidFill>
+                <a:latin typeface="Noto Sans CJK KR"/>
+              </a:rPr>
+              <a:t>14</a:t>
+            </a:r>
+          </a:p>
+        </p:txBody>
+      </p:sp>
+    </p:spTree>
+  </p:cSld>
+  <p:clrMapOvr>
+    <a:masterClrMapping/>
+  </p:clrMapOvr>
+</p:sld>
+</file>
+
+<file path=ppt/slides/slide15.xml><?xml version="1.0" encoding="utf-8"?>
 <p:sld xmlns:a="http://schemas.openxmlformats.org/drawingml/2006/main" xmlns:p="http://schemas.openxmlformats.org/presentationml/2006/main" xmlns:r="http://schemas.openxmlformats.org/officeDocument/2006/relationships">
   <p:cSld>
     <p:spTree>
@@ -5361,7 +5648,7 @@
                 </a:solidFill>
                 <a:latin typeface="Noto Sans CJK KR"/>
               </a:rPr>
-              <a:t>14</a:t>
+              <a:t>15</a:t>
             </a:r>
           </a:p>
         </p:txBody>
@@ -5374,7 +5661,7 @@
 </p:sld>
 </file>
 
-<file path=ppt/slides/slide15.xml><?xml version="1.0" encoding="utf-8"?>
+<file path=ppt/slides/slide16.xml><?xml version="1.0" encoding="utf-8"?>
 <p:sld xmlns:a="http://schemas.openxmlformats.org/drawingml/2006/main" xmlns:p="http://schemas.openxmlformats.org/presentationml/2006/main" xmlns:r="http://schemas.openxmlformats.org/officeDocument/2006/relationships">
   <p:cSld>
     <p:spTree>
@@ -5773,7 +6060,7 @@
                 </a:solidFill>
                 <a:latin typeface="Noto Sans CJK KR"/>
               </a:rPr>
-              <a:t>15</a:t>
+              <a:t>16</a:t>
             </a:r>
           </a:p>
         </p:txBody>
@@ -5786,7 +6073,7 @@
 </p:sld>
 </file>
 
-<file path=ppt/slides/slide16.xml><?xml version="1.0" encoding="utf-8"?>
+<file path=ppt/slides/slide17.xml><?xml version="1.0" encoding="utf-8"?>
 <p:sld xmlns:a="http://schemas.openxmlformats.org/drawingml/2006/main" xmlns:p="http://schemas.openxmlformats.org/presentationml/2006/main" xmlns:r="http://schemas.openxmlformats.org/officeDocument/2006/relationships">
   <p:cSld>
     <p:spTree>
@@ -6724,7 +7011,7 @@
                 </a:solidFill>
                 <a:latin typeface="Noto Sans CJK KR"/>
               </a:rPr>
-              <a:t>16</a:t>
+              <a:t>17</a:t>
             </a:r>
           </a:p>
         </p:txBody>
@@ -6737,7 +7024,7 @@
 </p:sld>
 </file>
 
-<file path=ppt/slides/slide17.xml><?xml version="1.0" encoding="utf-8"?>
+<file path=ppt/slides/slide18.xml><?xml version="1.0" encoding="utf-8"?>
 <p:sld xmlns:a="http://schemas.openxmlformats.org/drawingml/2006/main" xmlns:p="http://schemas.openxmlformats.org/presentationml/2006/main" xmlns:r="http://schemas.openxmlformats.org/officeDocument/2006/relationships">
   <p:cSld>
     <p:spTree>
@@ -7425,7 +7712,7 @@
                 </a:solidFill>
                 <a:latin typeface="Noto Sans CJK KR"/>
               </a:rPr>
-              <a:t>17</a:t>
+              <a:t>18</a:t>
             </a:r>
           </a:p>
         </p:txBody>
@@ -7438,7 +7725,7 @@
 </p:sld>
 </file>
 
-<file path=ppt/slides/slide18.xml><?xml version="1.0" encoding="utf-8"?>
+<file path=ppt/slides/slide19.xml><?xml version="1.0" encoding="utf-8"?>
 <p:sld xmlns:a="http://schemas.openxmlformats.org/drawingml/2006/main" xmlns:p="http://schemas.openxmlformats.org/presentationml/2006/main" xmlns:r="http://schemas.openxmlformats.org/officeDocument/2006/relationships">
   <p:cSld>
     <p:spTree>

--- a/presentation/TimeSorter_발표자료.pptx
+++ b/presentation/TimeSorter_발표자료.pptx
@@ -24,6 +24,7 @@
     <p:sldId id="272" r:id="rId23"/>
     <p:sldId id="273" r:id="rId24"/>
     <p:sldId id="274" r:id="rId25"/>
+    <p:sldId id="275" r:id="rId26"/>
   </p:sldIdLst>
   <p:sldSz cx="12191695" cy="6858000" type="screen4x3"/>
   <p:notesSz cx="6858000" cy="9144000"/>
@@ -4741,6 +4742,1029 @@
 </file>
 
 <file path=ppt/slides/slide15.xml><?xml version="1.0" encoding="utf-8"?>
+<p:sld xmlns:a="http://schemas.openxmlformats.org/drawingml/2006/main" xmlns:p="http://schemas.openxmlformats.org/presentationml/2006/main" xmlns:r="http://schemas.openxmlformats.org/officeDocument/2006/relationships">
+  <p:cSld>
+    <p:spTree>
+      <p:nvGrpSpPr>
+        <p:cNvPr id="1" name=""/>
+        <p:cNvGrpSpPr/>
+        <p:nvPr/>
+      </p:nvGrpSpPr>
+      <p:grpSpPr/>
+      <p:sp>
+        <p:nvSpPr>
+          <p:cNvPr id="2" name="Rectangle 1"/>
+          <p:cNvSpPr/>
+          <p:nvPr/>
+        </p:nvSpPr>
+        <p:spPr>
+          <a:xfrm>
+            <a:off x="0" y="0"/>
+            <a:ext cx="12191695" cy="1051560"/>
+          </a:xfrm>
+          <a:prstGeom prst="rect">
+            <a:avLst/>
+          </a:prstGeom>
+          <a:solidFill>
+            <a:srgbClr val="1F2D3D"/>
+          </a:solidFill>
+          <a:ln>
+            <a:noFill/>
+          </a:ln>
+          <a:effectLst/>
+        </p:spPr>
+        <p:style>
+          <a:lnRef idx="1">
+            <a:schemeClr val="accent1"/>
+          </a:lnRef>
+          <a:fillRef idx="3">
+            <a:schemeClr val="accent1"/>
+          </a:fillRef>
+          <a:effectRef idx="2">
+            <a:schemeClr val="accent1"/>
+          </a:effectRef>
+          <a:fontRef idx="minor">
+            <a:schemeClr val="lt1"/>
+          </a:fontRef>
+        </p:style>
+        <p:txBody>
+          <a:bodyPr rtlCol="0" anchor="ctr"/>
+          <a:lstStyle/>
+          <a:p>
+            <a:pPr algn="ctr"/>
+          </a:p>
+        </p:txBody>
+      </p:sp>
+      <p:sp>
+        <p:nvSpPr>
+          <p:cNvPr id="3" name="Rectangle 2"/>
+          <p:cNvSpPr/>
+          <p:nvPr/>
+        </p:nvSpPr>
+        <p:spPr>
+          <a:xfrm>
+            <a:off x="0" y="1051560"/>
+            <a:ext cx="12191695" cy="38100"/>
+          </a:xfrm>
+          <a:prstGeom prst="rect">
+            <a:avLst/>
+          </a:prstGeom>
+          <a:solidFill>
+            <a:srgbClr val="DD8452"/>
+          </a:solidFill>
+          <a:ln>
+            <a:noFill/>
+          </a:ln>
+          <a:effectLst/>
+        </p:spPr>
+        <p:style>
+          <a:lnRef idx="1">
+            <a:schemeClr val="accent1"/>
+          </a:lnRef>
+          <a:fillRef idx="3">
+            <a:schemeClr val="accent1"/>
+          </a:fillRef>
+          <a:effectRef idx="2">
+            <a:schemeClr val="accent1"/>
+          </a:effectRef>
+          <a:fontRef idx="minor">
+            <a:schemeClr val="lt1"/>
+          </a:fontRef>
+        </p:style>
+        <p:txBody>
+          <a:bodyPr rtlCol="0" anchor="ctr"/>
+          <a:lstStyle/>
+          <a:p>
+            <a:pPr algn="ctr"/>
+          </a:p>
+        </p:txBody>
+      </p:sp>
+      <p:sp>
+        <p:nvSpPr>
+          <p:cNvPr id="4" name="TextBox 3"/>
+          <p:cNvSpPr txBox="1"/>
+          <p:nvPr/>
+        </p:nvSpPr>
+        <p:spPr>
+          <a:xfrm>
+            <a:off x="457200" y="128016"/>
+            <a:ext cx="10972800" cy="320040"/>
+          </a:xfrm>
+          <a:prstGeom prst="rect">
+            <a:avLst/>
+          </a:prstGeom>
+          <a:noFill/>
+        </p:spPr>
+        <p:txBody>
+          <a:bodyPr wrap="square" anchor="t">
+            <a:spAutoFit/>
+          </a:bodyPr>
+          <a:lstStyle/>
+          <a:p>
+            <a:pPr algn="l"/>
+            <a:r>
+              <a:rPr sz="1200" b="1" i="0">
+                <a:solidFill>
+                  <a:srgbClr val="DD8452"/>
+                </a:solidFill>
+                <a:latin typeface="Noto Sans CJK KR"/>
+              </a:rPr>
+              <a:t>TRAINING METRICS</a:t>
+            </a:r>
+          </a:p>
+        </p:txBody>
+      </p:sp>
+      <p:sp>
+        <p:nvSpPr>
+          <p:cNvPr id="5" name="TextBox 4"/>
+          <p:cNvSpPr txBox="1"/>
+          <p:nvPr/>
+        </p:nvSpPr>
+        <p:spPr>
+          <a:xfrm>
+            <a:off x="457200" y="384048"/>
+            <a:ext cx="11247120" cy="594360"/>
+          </a:xfrm>
+          <a:prstGeom prst="rect">
+            <a:avLst/>
+          </a:prstGeom>
+          <a:noFill/>
+        </p:spPr>
+        <p:txBody>
+          <a:bodyPr wrap="square" anchor="t">
+            <a:spAutoFit/>
+          </a:bodyPr>
+          <a:lstStyle/>
+          <a:p>
+            <a:pPr algn="l"/>
+            <a:r>
+              <a:rPr sz="2600" b="1" i="0">
+                <a:solidFill>
+                  <a:srgbClr val="FFFFFF"/>
+                </a:solidFill>
+                <a:latin typeface="Noto Sans CJK KR"/>
+              </a:rPr>
+              <a:t>학습 지표 비교 — 4B vs 9B</a:t>
+            </a:r>
+          </a:p>
+        </p:txBody>
+      </p:sp>
+      <p:pic>
+        <p:nvPicPr>
+          <p:cNvPr id="6" name="Picture 5" descr="chart_train_metrics_4b_9b.png"/>
+          <p:cNvPicPr>
+            <a:picLocks noChangeAspect="1"/>
+          </p:cNvPicPr>
+          <p:nvPr/>
+        </p:nvPicPr>
+        <p:blipFill>
+          <a:blip r:embed="rId2"/>
+          <a:stretch>
+            <a:fillRect/>
+          </a:stretch>
+        </p:blipFill>
+        <p:spPr>
+          <a:xfrm>
+            <a:off x="365760" y="1994762"/>
+            <a:ext cx="6675120" cy="2594155"/>
+          </a:xfrm>
+          <a:prstGeom prst="rect">
+            <a:avLst/>
+          </a:prstGeom>
+        </p:spPr>
+      </p:pic>
+      <p:graphicFrame>
+        <p:nvGraphicFramePr>
+          <p:cNvPr id="7" name="Table 6"/>
+          <p:cNvGraphicFramePr>
+            <a:graphicFrameLocks noGrp="1"/>
+          </p:cNvGraphicFramePr>
+          <p:nvPr/>
+        </p:nvGraphicFramePr>
+        <p:xfrm>
+          <a:off x="7223760" y="1371600"/>
+          <a:ext cx="4572000" cy="4206240"/>
+        </p:xfrm>
+        <a:graphic>
+          <a:graphicData uri="http://schemas.openxmlformats.org/drawingml/2006/table">
+            <a:tbl>
+              <a:tblPr firstRow="1" bandRow="1">
+                <a:tableStyleId>{5C22544A-7EE6-4342-B048-85BDC9FD1C3A}</a:tableStyleId>
+              </a:tblPr>
+              <a:tblGrid>
+                <a:gridCol w="2103120"/>
+                <a:gridCol w="1325880"/>
+                <a:gridCol w="1143000"/>
+              </a:tblGrid>
+              <a:tr h="420624">
+                <a:tc>
+                  <a:txBody>
+                    <a:bodyPr wrap="square"/>
+                    <a:lstStyle/>
+                    <a:p>
+                      <a:pPr algn="l"/>
+                      <a:r>
+                        <a:rPr sz="1300" b="1" i="0">
+                          <a:solidFill>
+                            <a:srgbClr val="FFFFFF"/>
+                          </a:solidFill>
+                          <a:latin typeface="Noto Sans CJK KR"/>
+                        </a:rPr>
+                        <a:t>지표</a:t>
+                      </a:r>
+                    </a:p>
+                  </a:txBody>
+                  <a:tcPr marL="73152" marR="54864" marT="27432" marB="27432" anchor="ctr">
+                    <a:solidFill>
+                      <a:srgbClr val="4C72B0"/>
+                    </a:solidFill>
+                  </a:tcPr>
+                </a:tc>
+                <a:tc>
+                  <a:txBody>
+                    <a:bodyPr wrap="square"/>
+                    <a:lstStyle/>
+                    <a:p>
+                      <a:pPr algn="ctr"/>
+                      <a:r>
+                        <a:rPr sz="1300" b="1" i="0">
+                          <a:solidFill>
+                            <a:srgbClr val="FFFFFF"/>
+                          </a:solidFill>
+                          <a:latin typeface="Noto Sans CJK KR"/>
+                        </a:rPr>
+                        <a:t>4B</a:t>
+                      </a:r>
+                    </a:p>
+                  </a:txBody>
+                  <a:tcPr marL="73152" marR="54864" marT="27432" marB="27432" anchor="ctr">
+                    <a:solidFill>
+                      <a:srgbClr val="4C72B0"/>
+                    </a:solidFill>
+                  </a:tcPr>
+                </a:tc>
+                <a:tc>
+                  <a:txBody>
+                    <a:bodyPr wrap="square"/>
+                    <a:lstStyle/>
+                    <a:p>
+                      <a:pPr algn="ctr"/>
+                      <a:r>
+                        <a:rPr sz="1300" b="1" i="0">
+                          <a:solidFill>
+                            <a:srgbClr val="FFFFFF"/>
+                          </a:solidFill>
+                          <a:latin typeface="Noto Sans CJK KR"/>
+                        </a:rPr>
+                        <a:t>9B</a:t>
+                      </a:r>
+                    </a:p>
+                  </a:txBody>
+                  <a:tcPr marL="73152" marR="54864" marT="27432" marB="27432" anchor="ctr">
+                    <a:solidFill>
+                      <a:srgbClr val="4C72B0"/>
+                    </a:solidFill>
+                  </a:tcPr>
+                </a:tc>
+              </a:tr>
+              <a:tr h="420624">
+                <a:tc>
+                  <a:txBody>
+                    <a:bodyPr wrap="square"/>
+                    <a:lstStyle/>
+                    <a:p>
+                      <a:pPr algn="l"/>
+                      <a:r>
+                        <a:rPr sz="1150" b="0" i="0">
+                          <a:solidFill>
+                            <a:srgbClr val="222222"/>
+                          </a:solidFill>
+                          <a:latin typeface="Noto Sans CJK KR"/>
+                        </a:rPr>
+                        <a:t>파라미터</a:t>
+                      </a:r>
+                    </a:p>
+                  </a:txBody>
+                  <a:tcPr marL="73152" marR="54864" marT="27432" marB="27432" anchor="ctr">
+                    <a:solidFill>
+                      <a:srgbClr val="FFFFFF"/>
+                    </a:solidFill>
+                  </a:tcPr>
+                </a:tc>
+                <a:tc>
+                  <a:txBody>
+                    <a:bodyPr wrap="square"/>
+                    <a:lstStyle/>
+                    <a:p>
+                      <a:pPr algn="ctr"/>
+                      <a:r>
+                        <a:rPr sz="1150" b="0" i="0">
+                          <a:solidFill>
+                            <a:srgbClr val="222222"/>
+                          </a:solidFill>
+                          <a:latin typeface="Noto Sans CJK KR"/>
+                        </a:rPr>
+                        <a:t>4.2B</a:t>
+                      </a:r>
+                    </a:p>
+                  </a:txBody>
+                  <a:tcPr marL="73152" marR="54864" marT="27432" marB="27432" anchor="ctr">
+                    <a:solidFill>
+                      <a:srgbClr val="FFFFFF"/>
+                    </a:solidFill>
+                  </a:tcPr>
+                </a:tc>
+                <a:tc>
+                  <a:txBody>
+                    <a:bodyPr wrap="square"/>
+                    <a:lstStyle/>
+                    <a:p>
+                      <a:pPr algn="ctr"/>
+                      <a:r>
+                        <a:rPr sz="1150" b="0" i="0">
+                          <a:solidFill>
+                            <a:srgbClr val="222222"/>
+                          </a:solidFill>
+                          <a:latin typeface="Noto Sans CJK KR"/>
+                        </a:rPr>
+                        <a:t>9.4B</a:t>
+                      </a:r>
+                    </a:p>
+                  </a:txBody>
+                  <a:tcPr marL="73152" marR="54864" marT="27432" marB="27432" anchor="ctr">
+                    <a:solidFill>
+                      <a:srgbClr val="FFFFFF"/>
+                    </a:solidFill>
+                  </a:tcPr>
+                </a:tc>
+              </a:tr>
+              <a:tr h="420624">
+                <a:tc>
+                  <a:txBody>
+                    <a:bodyPr wrap="square"/>
+                    <a:lstStyle/>
+                    <a:p>
+                      <a:pPr algn="l"/>
+                      <a:r>
+                        <a:rPr sz="1150" b="0" i="0">
+                          <a:solidFill>
+                            <a:srgbClr val="222222"/>
+                          </a:solidFill>
+                          <a:latin typeface="Noto Sans CJK KR"/>
+                        </a:rPr>
+                        <a:t>GPU</a:t>
+                      </a:r>
+                    </a:p>
+                  </a:txBody>
+                  <a:tcPr marL="73152" marR="54864" marT="27432" marB="27432" anchor="ctr">
+                    <a:solidFill>
+                      <a:srgbClr val="F4F6F8"/>
+                    </a:solidFill>
+                  </a:tcPr>
+                </a:tc>
+                <a:tc>
+                  <a:txBody>
+                    <a:bodyPr wrap="square"/>
+                    <a:lstStyle/>
+                    <a:p>
+                      <a:pPr algn="ctr"/>
+                      <a:r>
+                        <a:rPr sz="1150" b="0" i="0">
+                          <a:solidFill>
+                            <a:srgbClr val="222222"/>
+                          </a:solidFill>
+                          <a:latin typeface="Noto Sans CJK KR"/>
+                        </a:rPr>
+                        <a:t>3080Ti 12G</a:t>
+                      </a:r>
+                    </a:p>
+                  </a:txBody>
+                  <a:tcPr marL="73152" marR="54864" marT="27432" marB="27432" anchor="ctr">
+                    <a:solidFill>
+                      <a:srgbClr val="F4F6F8"/>
+                    </a:solidFill>
+                  </a:tcPr>
+                </a:tc>
+                <a:tc>
+                  <a:txBody>
+                    <a:bodyPr wrap="square"/>
+                    <a:lstStyle/>
+                    <a:p>
+                      <a:pPr algn="ctr"/>
+                      <a:r>
+                        <a:rPr sz="1150" b="0" i="0">
+                          <a:solidFill>
+                            <a:srgbClr val="222222"/>
+                          </a:solidFill>
+                          <a:latin typeface="Noto Sans CJK KR"/>
+                        </a:rPr>
+                        <a:t>4090 24G</a:t>
+                      </a:r>
+                    </a:p>
+                  </a:txBody>
+                  <a:tcPr marL="73152" marR="54864" marT="27432" marB="27432" anchor="ctr">
+                    <a:solidFill>
+                      <a:srgbClr val="F4F6F8"/>
+                    </a:solidFill>
+                  </a:tcPr>
+                </a:tc>
+              </a:tr>
+              <a:tr h="420624">
+                <a:tc>
+                  <a:txBody>
+                    <a:bodyPr wrap="square"/>
+                    <a:lstStyle/>
+                    <a:p>
+                      <a:pPr algn="l"/>
+                      <a:r>
+                        <a:rPr sz="1150" b="0" i="0">
+                          <a:solidFill>
+                            <a:srgbClr val="222222"/>
+                          </a:solidFill>
+                          <a:latin typeface="Noto Sans CJK KR"/>
+                        </a:rPr>
+                        <a:t>SFT train_loss</a:t>
+                      </a:r>
+                    </a:p>
+                  </a:txBody>
+                  <a:tcPr marL="73152" marR="54864" marT="27432" marB="27432" anchor="ctr">
+                    <a:solidFill>
+                      <a:srgbClr val="FFFFFF"/>
+                    </a:solidFill>
+                  </a:tcPr>
+                </a:tc>
+                <a:tc>
+                  <a:txBody>
+                    <a:bodyPr wrap="square"/>
+                    <a:lstStyle/>
+                    <a:p>
+                      <a:pPr algn="ctr"/>
+                      <a:r>
+                        <a:rPr sz="1150" b="0" i="0">
+                          <a:solidFill>
+                            <a:srgbClr val="222222"/>
+                          </a:solidFill>
+                          <a:latin typeface="Noto Sans CJK KR"/>
+                        </a:rPr>
+                        <a:t>0.309</a:t>
+                      </a:r>
+                    </a:p>
+                  </a:txBody>
+                  <a:tcPr marL="73152" marR="54864" marT="27432" marB="27432" anchor="ctr">
+                    <a:solidFill>
+                      <a:srgbClr val="FFFFFF"/>
+                    </a:solidFill>
+                  </a:tcPr>
+                </a:tc>
+                <a:tc>
+                  <a:txBody>
+                    <a:bodyPr wrap="square"/>
+                    <a:lstStyle/>
+                    <a:p>
+                      <a:pPr algn="ctr"/>
+                      <a:r>
+                        <a:rPr sz="1150" b="0" i="0">
+                          <a:solidFill>
+                            <a:srgbClr val="222222"/>
+                          </a:solidFill>
+                          <a:latin typeface="Noto Sans CJK KR"/>
+                        </a:rPr>
+                        <a:t>0.320</a:t>
+                      </a:r>
+                    </a:p>
+                  </a:txBody>
+                  <a:tcPr marL="73152" marR="54864" marT="27432" marB="27432" anchor="ctr">
+                    <a:solidFill>
+                      <a:srgbClr val="FFFFFF"/>
+                    </a:solidFill>
+                  </a:tcPr>
+                </a:tc>
+              </a:tr>
+              <a:tr h="420624">
+                <a:tc>
+                  <a:txBody>
+                    <a:bodyPr wrap="square"/>
+                    <a:lstStyle/>
+                    <a:p>
+                      <a:pPr algn="l"/>
+                      <a:r>
+                        <a:rPr sz="1150" b="0" i="0">
+                          <a:solidFill>
+                            <a:srgbClr val="222222"/>
+                          </a:solidFill>
+                          <a:latin typeface="Noto Sans CJK KR"/>
+                        </a:rPr>
+                        <a:t>SFT token acc</a:t>
+                      </a:r>
+                    </a:p>
+                  </a:txBody>
+                  <a:tcPr marL="73152" marR="54864" marT="27432" marB="27432" anchor="ctr">
+                    <a:solidFill>
+                      <a:srgbClr val="F4F6F8"/>
+                    </a:solidFill>
+                  </a:tcPr>
+                </a:tc>
+                <a:tc>
+                  <a:txBody>
+                    <a:bodyPr wrap="square"/>
+                    <a:lstStyle/>
+                    <a:p>
+                      <a:pPr algn="ctr"/>
+                      <a:r>
+                        <a:rPr sz="1150" b="0" i="0">
+                          <a:solidFill>
+                            <a:srgbClr val="222222"/>
+                          </a:solidFill>
+                          <a:latin typeface="Noto Sans CJK KR"/>
+                        </a:rPr>
+                        <a:t>90.8%</a:t>
+                      </a:r>
+                    </a:p>
+                  </a:txBody>
+                  <a:tcPr marL="73152" marR="54864" marT="27432" marB="27432" anchor="ctr">
+                    <a:solidFill>
+                      <a:srgbClr val="F4F6F8"/>
+                    </a:solidFill>
+                  </a:tcPr>
+                </a:tc>
+                <a:tc>
+                  <a:txBody>
+                    <a:bodyPr wrap="square"/>
+                    <a:lstStyle/>
+                    <a:p>
+                      <a:pPr algn="ctr"/>
+                      <a:r>
+                        <a:rPr sz="1150" b="0" i="0">
+                          <a:solidFill>
+                            <a:srgbClr val="222222"/>
+                          </a:solidFill>
+                          <a:latin typeface="Noto Sans CJK KR"/>
+                        </a:rPr>
+                        <a:t>91.5%</a:t>
+                      </a:r>
+                    </a:p>
+                  </a:txBody>
+                  <a:tcPr marL="73152" marR="54864" marT="27432" marB="27432" anchor="ctr">
+                    <a:solidFill>
+                      <a:srgbClr val="F4F6F8"/>
+                    </a:solidFill>
+                  </a:tcPr>
+                </a:tc>
+              </a:tr>
+              <a:tr h="420624">
+                <a:tc>
+                  <a:txBody>
+                    <a:bodyPr wrap="square"/>
+                    <a:lstStyle/>
+                    <a:p>
+                      <a:pPr algn="l"/>
+                      <a:r>
+                        <a:rPr sz="1150" b="0" i="0">
+                          <a:solidFill>
+                            <a:srgbClr val="222222"/>
+                          </a:solidFill>
+                          <a:latin typeface="Noto Sans CJK KR"/>
+                        </a:rPr>
+                        <a:t>SFT 시간</a:t>
+                      </a:r>
+                    </a:p>
+                  </a:txBody>
+                  <a:tcPr marL="73152" marR="54864" marT="27432" marB="27432" anchor="ctr">
+                    <a:solidFill>
+                      <a:srgbClr val="FFFFFF"/>
+                    </a:solidFill>
+                  </a:tcPr>
+                </a:tc>
+                <a:tc>
+                  <a:txBody>
+                    <a:bodyPr wrap="square"/>
+                    <a:lstStyle/>
+                    <a:p>
+                      <a:pPr algn="ctr"/>
+                      <a:r>
+                        <a:rPr sz="1150" b="0" i="0">
+                          <a:solidFill>
+                            <a:srgbClr val="222222"/>
+                          </a:solidFill>
+                          <a:latin typeface="Noto Sans CJK KR"/>
+                        </a:rPr>
+                        <a:t>9.5h</a:t>
+                      </a:r>
+                    </a:p>
+                  </a:txBody>
+                  <a:tcPr marL="73152" marR="54864" marT="27432" marB="27432" anchor="ctr">
+                    <a:solidFill>
+                      <a:srgbClr val="FFFFFF"/>
+                    </a:solidFill>
+                  </a:tcPr>
+                </a:tc>
+                <a:tc>
+                  <a:txBody>
+                    <a:bodyPr wrap="square"/>
+                    <a:lstStyle/>
+                    <a:p>
+                      <a:pPr algn="ctr"/>
+                      <a:r>
+                        <a:rPr sz="1150" b="0" i="0">
+                          <a:solidFill>
+                            <a:srgbClr val="222222"/>
+                          </a:solidFill>
+                          <a:latin typeface="Noto Sans CJK KR"/>
+                        </a:rPr>
+                        <a:t>11.5h</a:t>
+                      </a:r>
+                    </a:p>
+                  </a:txBody>
+                  <a:tcPr marL="73152" marR="54864" marT="27432" marB="27432" anchor="ctr">
+                    <a:solidFill>
+                      <a:srgbClr val="FFFFFF"/>
+                    </a:solidFill>
+                  </a:tcPr>
+                </a:tc>
+              </a:tr>
+              <a:tr h="420624">
+                <a:tc>
+                  <a:txBody>
+                    <a:bodyPr wrap="square"/>
+                    <a:lstStyle/>
+                    <a:p>
+                      <a:pPr algn="l"/>
+                      <a:r>
+                        <a:rPr sz="1150" b="0" i="0">
+                          <a:solidFill>
+                            <a:srgbClr val="222222"/>
+                          </a:solidFill>
+                          <a:latin typeface="Noto Sans CJK KR"/>
+                        </a:rPr>
+                        <a:t>DPO reward_acc</a:t>
+                      </a:r>
+                    </a:p>
+                  </a:txBody>
+                  <a:tcPr marL="73152" marR="54864" marT="27432" marB="27432" anchor="ctr">
+                    <a:solidFill>
+                      <a:srgbClr val="F4F6F8"/>
+                    </a:solidFill>
+                  </a:tcPr>
+                </a:tc>
+                <a:tc>
+                  <a:txBody>
+                    <a:bodyPr wrap="square"/>
+                    <a:lstStyle/>
+                    <a:p>
+                      <a:pPr algn="ctr"/>
+                      <a:r>
+                        <a:rPr sz="1150" b="0" i="0">
+                          <a:solidFill>
+                            <a:srgbClr val="222222"/>
+                          </a:solidFill>
+                          <a:latin typeface="Noto Sans CJK KR"/>
+                        </a:rPr>
+                        <a:t>97.5%</a:t>
+                      </a:r>
+                    </a:p>
+                  </a:txBody>
+                  <a:tcPr marL="73152" marR="54864" marT="27432" marB="27432" anchor="ctr">
+                    <a:solidFill>
+                      <a:srgbClr val="F4F6F8"/>
+                    </a:solidFill>
+                  </a:tcPr>
+                </a:tc>
+                <a:tc>
+                  <a:txBody>
+                    <a:bodyPr wrap="square"/>
+                    <a:lstStyle/>
+                    <a:p>
+                      <a:pPr algn="ctr"/>
+                      <a:r>
+                        <a:rPr sz="1150" b="0" i="0">
+                          <a:solidFill>
+                            <a:srgbClr val="222222"/>
+                          </a:solidFill>
+                          <a:latin typeface="Noto Sans CJK KR"/>
+                        </a:rPr>
+                        <a:t>88.0%</a:t>
+                      </a:r>
+                    </a:p>
+                  </a:txBody>
+                  <a:tcPr marL="73152" marR="54864" marT="27432" marB="27432" anchor="ctr">
+                    <a:solidFill>
+                      <a:srgbClr val="F4F6F8"/>
+                    </a:solidFill>
+                  </a:tcPr>
+                </a:tc>
+              </a:tr>
+              <a:tr h="420624">
+                <a:tc>
+                  <a:txBody>
+                    <a:bodyPr wrap="square"/>
+                    <a:lstStyle/>
+                    <a:p>
+                      <a:pPr algn="l"/>
+                      <a:r>
+                        <a:rPr sz="1150" b="0" i="0">
+                          <a:solidFill>
+                            <a:srgbClr val="222222"/>
+                          </a:solidFill>
+                          <a:latin typeface="Noto Sans CJK KR"/>
+                        </a:rPr>
+                        <a:t>DPO margin</a:t>
+                      </a:r>
+                    </a:p>
+                  </a:txBody>
+                  <a:tcPr marL="73152" marR="54864" marT="27432" marB="27432" anchor="ctr">
+                    <a:solidFill>
+                      <a:srgbClr val="FFFFFF"/>
+                    </a:solidFill>
+                  </a:tcPr>
+                </a:tc>
+                <a:tc>
+                  <a:txBody>
+                    <a:bodyPr wrap="square"/>
+                    <a:lstStyle/>
+                    <a:p>
+                      <a:pPr algn="ctr"/>
+                      <a:r>
+                        <a:rPr sz="1150" b="0" i="0">
+                          <a:solidFill>
+                            <a:srgbClr val="222222"/>
+                          </a:solidFill>
+                          <a:latin typeface="Noto Sans CJK KR"/>
+                        </a:rPr>
+                        <a:t>3.50</a:t>
+                      </a:r>
+                    </a:p>
+                  </a:txBody>
+                  <a:tcPr marL="73152" marR="54864" marT="27432" marB="27432" anchor="ctr">
+                    <a:solidFill>
+                      <a:srgbClr val="FFFFFF"/>
+                    </a:solidFill>
+                  </a:tcPr>
+                </a:tc>
+                <a:tc>
+                  <a:txBody>
+                    <a:bodyPr wrap="square"/>
+                    <a:lstStyle/>
+                    <a:p>
+                      <a:pPr algn="ctr"/>
+                      <a:r>
+                        <a:rPr sz="1150" b="0" i="0">
+                          <a:solidFill>
+                            <a:srgbClr val="222222"/>
+                          </a:solidFill>
+                          <a:latin typeface="Noto Sans CJK KR"/>
+                        </a:rPr>
+                        <a:t>0.099</a:t>
+                      </a:r>
+                    </a:p>
+                  </a:txBody>
+                  <a:tcPr marL="73152" marR="54864" marT="27432" marB="27432" anchor="ctr">
+                    <a:solidFill>
+                      <a:srgbClr val="FFFFFF"/>
+                    </a:solidFill>
+                  </a:tcPr>
+                </a:tc>
+              </a:tr>
+              <a:tr h="420624">
+                <a:tc>
+                  <a:txBody>
+                    <a:bodyPr wrap="square"/>
+                    <a:lstStyle/>
+                    <a:p>
+                      <a:pPr algn="l"/>
+                      <a:r>
+                        <a:rPr sz="1150" b="0" i="0">
+                          <a:solidFill>
+                            <a:srgbClr val="222222"/>
+                          </a:solidFill>
+                          <a:latin typeface="Noto Sans CJK KR"/>
+                        </a:rPr>
+                        <a:t>DPO 시간</a:t>
+                      </a:r>
+                    </a:p>
+                  </a:txBody>
+                  <a:tcPr marL="73152" marR="54864" marT="27432" marB="27432" anchor="ctr">
+                    <a:solidFill>
+                      <a:srgbClr val="F4F6F8"/>
+                    </a:solidFill>
+                  </a:tcPr>
+                </a:tc>
+                <a:tc>
+                  <a:txBody>
+                    <a:bodyPr wrap="square"/>
+                    <a:lstStyle/>
+                    <a:p>
+                      <a:pPr algn="ctr"/>
+                      <a:r>
+                        <a:rPr sz="1150" b="0" i="0">
+                          <a:solidFill>
+                            <a:srgbClr val="222222"/>
+                          </a:solidFill>
+                          <a:latin typeface="Noto Sans CJK KR"/>
+                        </a:rPr>
+                        <a:t>~0.5h</a:t>
+                      </a:r>
+                    </a:p>
+                  </a:txBody>
+                  <a:tcPr marL="73152" marR="54864" marT="27432" marB="27432" anchor="ctr">
+                    <a:solidFill>
+                      <a:srgbClr val="F4F6F8"/>
+                    </a:solidFill>
+                  </a:tcPr>
+                </a:tc>
+                <a:tc>
+                  <a:txBody>
+                    <a:bodyPr wrap="square"/>
+                    <a:lstStyle/>
+                    <a:p>
+                      <a:pPr algn="ctr"/>
+                      <a:r>
+                        <a:rPr sz="1150" b="0" i="0">
+                          <a:solidFill>
+                            <a:srgbClr val="222222"/>
+                          </a:solidFill>
+                          <a:latin typeface="Noto Sans CJK KR"/>
+                        </a:rPr>
+                        <a:t>2.5h</a:t>
+                      </a:r>
+                    </a:p>
+                  </a:txBody>
+                  <a:tcPr marL="73152" marR="54864" marT="27432" marB="27432" anchor="ctr">
+                    <a:solidFill>
+                      <a:srgbClr val="F4F6F8"/>
+                    </a:solidFill>
+                  </a:tcPr>
+                </a:tc>
+              </a:tr>
+              <a:tr h="420624">
+                <a:tc>
+                  <a:txBody>
+                    <a:bodyPr wrap="square"/>
+                    <a:lstStyle/>
+                    <a:p>
+                      <a:pPr algn="l"/>
+                      <a:r>
+                        <a:rPr sz="1150" b="0" i="0">
+                          <a:solidFill>
+                            <a:srgbClr val="222222"/>
+                          </a:solidFill>
+                          <a:latin typeface="Noto Sans CJK KR"/>
+                        </a:rPr>
+                        <a:t>검증 통과율</a:t>
+                      </a:r>
+                    </a:p>
+                  </a:txBody>
+                  <a:tcPr marL="73152" marR="54864" marT="27432" marB="27432" anchor="ctr">
+                    <a:solidFill>
+                      <a:srgbClr val="FFFFFF"/>
+                    </a:solidFill>
+                  </a:tcPr>
+                </a:tc>
+                <a:tc>
+                  <a:txBody>
+                    <a:bodyPr wrap="square"/>
+                    <a:lstStyle/>
+                    <a:p>
+                      <a:pPr algn="ctr"/>
+                      <a:r>
+                        <a:rPr sz="1150" b="0" i="0">
+                          <a:solidFill>
+                            <a:srgbClr val="222222"/>
+                          </a:solidFill>
+                          <a:latin typeface="Noto Sans CJK KR"/>
+                        </a:rPr>
+                        <a:t>90.0%</a:t>
+                      </a:r>
+                    </a:p>
+                  </a:txBody>
+                  <a:tcPr marL="73152" marR="54864" marT="27432" marB="27432" anchor="ctr">
+                    <a:solidFill>
+                      <a:srgbClr val="FFFFFF"/>
+                    </a:solidFill>
+                  </a:tcPr>
+                </a:tc>
+                <a:tc>
+                  <a:txBody>
+                    <a:bodyPr wrap="square"/>
+                    <a:lstStyle/>
+                    <a:p>
+                      <a:pPr algn="ctr"/>
+                      <a:r>
+                        <a:rPr sz="1150" b="0" i="0">
+                          <a:solidFill>
+                            <a:srgbClr val="222222"/>
+                          </a:solidFill>
+                          <a:latin typeface="Noto Sans CJK KR"/>
+                        </a:rPr>
+                        <a:t>88.7%</a:t>
+                      </a:r>
+                    </a:p>
+                  </a:txBody>
+                  <a:tcPr marL="73152" marR="54864" marT="27432" marB="27432" anchor="ctr">
+                    <a:solidFill>
+                      <a:srgbClr val="FFFFFF"/>
+                    </a:solidFill>
+                  </a:tcPr>
+                </a:tc>
+              </a:tr>
+            </a:tbl>
+          </a:graphicData>
+        </a:graphic>
+      </p:graphicFrame>
+      <p:sp>
+        <p:nvSpPr>
+          <p:cNvPr id="8" name="TextBox 7"/>
+          <p:cNvSpPr txBox="1"/>
+          <p:nvPr/>
+        </p:nvSpPr>
+        <p:spPr>
+          <a:xfrm>
+            <a:off x="365760" y="5532120"/>
+            <a:ext cx="11430000" cy="914400"/>
+          </a:xfrm>
+          <a:prstGeom prst="rect">
+            <a:avLst/>
+          </a:prstGeom>
+          <a:noFill/>
+        </p:spPr>
+        <p:txBody>
+          <a:bodyPr wrap="square" anchor="t">
+            <a:spAutoFit/>
+          </a:bodyPr>
+          <a:lstStyle/>
+          <a:p>
+            <a:pPr algn="ctr"/>
+            <a:r>
+              <a:rPr sz="1250" b="1" i="0">
+                <a:solidFill>
+                  <a:srgbClr val="1F2D3D"/>
+                </a:solidFill>
+                <a:latin typeface="Noto Sans CJK KR"/>
+              </a:rPr>
+              <a:t>SFT(동일 데이터): 9B도 4B와 거의 동일 — 모델 2.3×로도 SFT 학습 이득 미미</a:t>
+            </a:r>
+          </a:p>
+          <a:p>
+            <a:pPr algn="ctr">
+              <a:spcBef>
+                <a:spcPts val="300"/>
+              </a:spcBef>
+            </a:pPr>
+            <a:r>
+              <a:rPr sz="1100" b="0" i="1">
+                <a:solidFill>
+                  <a:srgbClr val="5A5A5A"/>
+                </a:solidFill>
+                <a:latin typeface="Noto Sans CJK KR"/>
+              </a:rPr>
+              <a:t>DPO(데이터 다름): margin 차이(3.50 vs 0.099)는 모델이 아닌 데이터 난이도(on-policy vs v4_extra) 탓</a:t>
+            </a:r>
+          </a:p>
+        </p:txBody>
+      </p:sp>
+      <p:sp>
+        <p:nvSpPr>
+          <p:cNvPr id="9" name="TextBox 8"/>
+          <p:cNvSpPr txBox="1"/>
+          <p:nvPr/>
+        </p:nvSpPr>
+        <p:spPr>
+          <a:xfrm>
+            <a:off x="10789920" y="6446520"/>
+            <a:ext cx="1280160" cy="320040"/>
+          </a:xfrm>
+          <a:prstGeom prst="rect">
+            <a:avLst/>
+          </a:prstGeom>
+          <a:noFill/>
+        </p:spPr>
+        <p:txBody>
+          <a:bodyPr wrap="square" anchor="t">
+            <a:spAutoFit/>
+          </a:bodyPr>
+          <a:lstStyle/>
+          <a:p>
+            <a:pPr algn="r"/>
+            <a:r>
+              <a:rPr sz="1000" b="0" i="0">
+                <a:solidFill>
+                  <a:srgbClr val="5A5A5A"/>
+                </a:solidFill>
+                <a:latin typeface="Noto Sans CJK KR"/>
+              </a:rPr>
+              <a:t>15</a:t>
+            </a:r>
+          </a:p>
+        </p:txBody>
+      </p:sp>
+    </p:spTree>
+  </p:cSld>
+  <p:clrMapOvr>
+    <a:masterClrMapping/>
+  </p:clrMapOvr>
+</p:sld>
+</file>
+
+<file path=ppt/slides/slide16.xml><?xml version="1.0" encoding="utf-8"?>
 <p:sld xmlns:a="http://schemas.openxmlformats.org/drawingml/2006/main" xmlns:p="http://schemas.openxmlformats.org/presentationml/2006/main" xmlns:r="http://schemas.openxmlformats.org/officeDocument/2006/relationships">
   <p:cSld>
     <p:spTree>
@@ -5648,7 +6672,7 @@
                 </a:solidFill>
                 <a:latin typeface="Noto Sans CJK KR"/>
               </a:rPr>
-              <a:t>15</a:t>
+              <a:t>16</a:t>
             </a:r>
           </a:p>
         </p:txBody>
@@ -5661,7 +6685,7 @@
 </p:sld>
 </file>
 
-<file path=ppt/slides/slide16.xml><?xml version="1.0" encoding="utf-8"?>
+<file path=ppt/slides/slide17.xml><?xml version="1.0" encoding="utf-8"?>
 <p:sld xmlns:a="http://schemas.openxmlformats.org/drawingml/2006/main" xmlns:p="http://schemas.openxmlformats.org/presentationml/2006/main" xmlns:r="http://schemas.openxmlformats.org/officeDocument/2006/relationships">
   <p:cSld>
     <p:spTree>
@@ -6060,7 +7084,7 @@
                 </a:solidFill>
                 <a:latin typeface="Noto Sans CJK KR"/>
               </a:rPr>
-              <a:t>16</a:t>
+              <a:t>17</a:t>
             </a:r>
           </a:p>
         </p:txBody>
@@ -6073,7 +7097,7 @@
 </p:sld>
 </file>
 
-<file path=ppt/slides/slide17.xml><?xml version="1.0" encoding="utf-8"?>
+<file path=ppt/slides/slide18.xml><?xml version="1.0" encoding="utf-8"?>
 <p:sld xmlns:a="http://schemas.openxmlformats.org/drawingml/2006/main" xmlns:p="http://schemas.openxmlformats.org/presentationml/2006/main" xmlns:r="http://schemas.openxmlformats.org/officeDocument/2006/relationships">
   <p:cSld>
     <p:spTree>
@@ -7011,7 +8035,7 @@
                 </a:solidFill>
                 <a:latin typeface="Noto Sans CJK KR"/>
               </a:rPr>
-              <a:t>17</a:t>
+              <a:t>18</a:t>
             </a:r>
           </a:p>
         </p:txBody>
@@ -7024,7 +8048,7 @@
 </p:sld>
 </file>
 
-<file path=ppt/slides/slide18.xml><?xml version="1.0" encoding="utf-8"?>
+<file path=ppt/slides/slide19.xml><?xml version="1.0" encoding="utf-8"?>
 <p:sld xmlns:a="http://schemas.openxmlformats.org/drawingml/2006/main" xmlns:p="http://schemas.openxmlformats.org/presentationml/2006/main" xmlns:r="http://schemas.openxmlformats.org/officeDocument/2006/relationships">
   <p:cSld>
     <p:spTree>
@@ -7712,344 +8736,7 @@
                 </a:solidFill>
                 <a:latin typeface="Noto Sans CJK KR"/>
               </a:rPr>
-              <a:t>18</a:t>
-            </a:r>
-          </a:p>
-        </p:txBody>
-      </p:sp>
-    </p:spTree>
-  </p:cSld>
-  <p:clrMapOvr>
-    <a:masterClrMapping/>
-  </p:clrMapOvr>
-</p:sld>
-</file>
-
-<file path=ppt/slides/slide19.xml><?xml version="1.0" encoding="utf-8"?>
-<p:sld xmlns:a="http://schemas.openxmlformats.org/drawingml/2006/main" xmlns:p="http://schemas.openxmlformats.org/presentationml/2006/main" xmlns:r="http://schemas.openxmlformats.org/officeDocument/2006/relationships">
-  <p:cSld>
-    <p:spTree>
-      <p:nvGrpSpPr>
-        <p:cNvPr id="1" name=""/>
-        <p:cNvGrpSpPr/>
-        <p:nvPr/>
-      </p:nvGrpSpPr>
-      <p:grpSpPr/>
-      <p:sp>
-        <p:nvSpPr>
-          <p:cNvPr id="2" name="Rectangle 1"/>
-          <p:cNvSpPr/>
-          <p:nvPr/>
-        </p:nvSpPr>
-        <p:spPr>
-          <a:xfrm>
-            <a:off x="0" y="0"/>
-            <a:ext cx="12191695" cy="6858000"/>
-          </a:xfrm>
-          <a:prstGeom prst="rect">
-            <a:avLst/>
-          </a:prstGeom>
-          <a:solidFill>
-            <a:srgbClr val="1F2D3D"/>
-          </a:solidFill>
-          <a:ln>
-            <a:noFill/>
-          </a:ln>
-          <a:effectLst/>
-        </p:spPr>
-        <p:style>
-          <a:lnRef idx="1">
-            <a:schemeClr val="accent1"/>
-          </a:lnRef>
-          <a:fillRef idx="3">
-            <a:schemeClr val="accent1"/>
-          </a:fillRef>
-          <a:effectRef idx="2">
-            <a:schemeClr val="accent1"/>
-          </a:effectRef>
-          <a:fontRef idx="minor">
-            <a:schemeClr val="lt1"/>
-          </a:fontRef>
-        </p:style>
-        <p:txBody>
-          <a:bodyPr rtlCol="0" anchor="ctr"/>
-          <a:lstStyle/>
-          <a:p>
-            <a:pPr algn="ctr"/>
-          </a:p>
-        </p:txBody>
-      </p:sp>
-      <p:sp>
-        <p:nvSpPr>
-          <p:cNvPr id="3" name="Rectangle 2"/>
-          <p:cNvSpPr/>
-          <p:nvPr/>
-        </p:nvSpPr>
-        <p:spPr>
-          <a:xfrm>
-            <a:off x="0" y="914400"/>
-            <a:ext cx="12191695" cy="38100"/>
-          </a:xfrm>
-          <a:prstGeom prst="rect">
-            <a:avLst/>
-          </a:prstGeom>
-          <a:solidFill>
-            <a:srgbClr val="DD8452"/>
-          </a:solidFill>
-          <a:ln>
-            <a:noFill/>
-          </a:ln>
-          <a:effectLst/>
-        </p:spPr>
-        <p:style>
-          <a:lnRef idx="1">
-            <a:schemeClr val="accent1"/>
-          </a:lnRef>
-          <a:fillRef idx="3">
-            <a:schemeClr val="accent1"/>
-          </a:fillRef>
-          <a:effectRef idx="2">
-            <a:schemeClr val="accent1"/>
-          </a:effectRef>
-          <a:fontRef idx="minor">
-            <a:schemeClr val="lt1"/>
-          </a:fontRef>
-        </p:style>
-        <p:txBody>
-          <a:bodyPr rtlCol="0" anchor="ctr"/>
-          <a:lstStyle/>
-          <a:p>
-            <a:pPr algn="ctr"/>
-          </a:p>
-        </p:txBody>
-      </p:sp>
-      <p:sp>
-        <p:nvSpPr>
-          <p:cNvPr id="4" name="TextBox 3"/>
-          <p:cNvSpPr txBox="1"/>
-          <p:nvPr/>
-        </p:nvSpPr>
-        <p:spPr>
-          <a:xfrm>
-            <a:off x="640080" y="320040"/>
-            <a:ext cx="10972800" cy="640080"/>
-          </a:xfrm>
-          <a:prstGeom prst="rect">
-            <a:avLst/>
-          </a:prstGeom>
-          <a:noFill/>
-        </p:spPr>
-        <p:txBody>
-          <a:bodyPr wrap="square" anchor="t">
-            <a:spAutoFit/>
-          </a:bodyPr>
-          <a:lstStyle/>
-          <a:p>
-            <a:pPr algn="l"/>
-            <a:r>
-              <a:rPr sz="3000" b="1" i="0">
-                <a:solidFill>
-                  <a:srgbClr val="FFFFFF"/>
-                </a:solidFill>
-                <a:latin typeface="Noto Sans CJK KR"/>
-              </a:rPr>
-              <a:t>결론 &amp; 향후 과제</a:t>
-            </a:r>
-          </a:p>
-        </p:txBody>
-      </p:sp>
-      <p:sp>
-        <p:nvSpPr>
-          <p:cNvPr id="5" name="TextBox 4"/>
-          <p:cNvSpPr txBox="1"/>
-          <p:nvPr/>
-        </p:nvSpPr>
-        <p:spPr>
-          <a:xfrm>
-            <a:off x="822960" y="1371600"/>
-            <a:ext cx="10515600" cy="2926080"/>
-          </a:xfrm>
-          <a:prstGeom prst="rect">
-            <a:avLst/>
-          </a:prstGeom>
-          <a:noFill/>
-        </p:spPr>
-        <p:txBody>
-          <a:bodyPr wrap="square" anchor="t">
-            <a:spAutoFit/>
-          </a:bodyPr>
-          <a:lstStyle/>
-          <a:p>
-            <a:pPr algn="l">
-              <a:spcAft>
-                <a:spcPts val="400"/>
-              </a:spcAft>
-            </a:pPr>
-            <a:r>
-              <a:rPr sz="1700" b="1" i="0">
-                <a:solidFill>
-                  <a:srgbClr val="DD8452"/>
-                </a:solidFill>
-                <a:latin typeface="Noto Sans CJK KR"/>
-              </a:rPr>
-              <a:t>•  성능 점프는 데이터 품질·loss 마스킹에서 나왔다</a:t>
-            </a:r>
-          </a:p>
-          <a:p>
-            <a:pPr algn="l" lvl="1">
-              <a:spcAft>
-                <a:spcPts val="1000"/>
-              </a:spcAft>
-            </a:pPr>
-            <a:r>
-              <a:rPr sz="1300" b="0" i="0">
-                <a:solidFill>
-                  <a:srgbClr val="C9D4E0"/>
-                </a:solidFill>
-                <a:latin typeface="Noto Sans CJK KR"/>
-              </a:rPr>
-              <a:t>DPO/GRPO 선호학습 단독으로는 한계 약점을 못 옮김 (+20.6%p는 SFT 데이터 큐레이션)</a:t>
-            </a:r>
-          </a:p>
-          <a:p>
-            <a:pPr algn="l">
-              <a:spcAft>
-                <a:spcPts val="400"/>
-              </a:spcAft>
-            </a:pPr>
-            <a:r>
-              <a:rPr sz="1700" b="1" i="0">
-                <a:solidFill>
-                  <a:srgbClr val="DD8452"/>
-                </a:solidFill>
-                <a:latin typeface="Noto Sans CJK KR"/>
-              </a:rPr>
-              <a:t>•  파인튜닝의 1차 효과는 정확한 JSON 스키마 준수</a:t>
-            </a:r>
-          </a:p>
-          <a:p>
-            <a:pPr algn="l" lvl="1">
-              <a:spcAft>
-                <a:spcPts val="1000"/>
-              </a:spcAft>
-            </a:pPr>
-            <a:r>
-              <a:rPr sz="1300" b="0" i="0">
-                <a:solidFill>
-                  <a:srgbClr val="C9D4E0"/>
-                </a:solidFill>
-                <a:latin typeface="Noto Sans CJK KR"/>
-              </a:rPr>
-              <a:t>instruct 0% → SFT 90%: 추론이 아닌 출력 규격 고정이 핵심</a:t>
-            </a:r>
-          </a:p>
-          <a:p>
-            <a:pPr algn="l">
-              <a:spcAft>
-                <a:spcPts val="400"/>
-              </a:spcAft>
-            </a:pPr>
-            <a:r>
-              <a:rPr sz="1700" b="1" i="0">
-                <a:solidFill>
-                  <a:srgbClr val="DD8452"/>
-                </a:solidFill>
-                <a:latin typeface="Noto Sans CJK KR"/>
-              </a:rPr>
-              <a:t>•  의존성 체인은 미해결 — SFT 데이터 증량이 다음 레버</a:t>
-            </a:r>
-          </a:p>
-          <a:p>
-            <a:pPr algn="l" lvl="1"/>
-            <a:r>
-              <a:rPr sz="1300" b="0" i="0">
-                <a:solidFill>
-                  <a:srgbClr val="C9D4E0"/>
-                </a:solidFill>
-                <a:latin typeface="Noto Sans CJK KR"/>
-              </a:rPr>
-              <a:t>4–5단계 긴 체인 특화 데이터 3× 증량으로 능력 자체를 보강해야</a:t>
-            </a:r>
-          </a:p>
-        </p:txBody>
-      </p:sp>
-      <p:sp>
-        <p:nvSpPr>
-          <p:cNvPr id="6" name="Rectangle 5"/>
-          <p:cNvSpPr/>
-          <p:nvPr/>
-        </p:nvSpPr>
-        <p:spPr>
-          <a:xfrm>
-            <a:off x="822960" y="5120640"/>
-            <a:ext cx="10515600" cy="1005840"/>
-          </a:xfrm>
-          <a:prstGeom prst="rect">
-            <a:avLst/>
-          </a:prstGeom>
-          <a:solidFill>
-            <a:srgbClr val="2A3B4F"/>
-          </a:solidFill>
-          <a:ln w="12700">
-            <a:solidFill>
-              <a:srgbClr val="DD8452"/>
-            </a:solidFill>
-          </a:ln>
-          <a:effectLst/>
-        </p:spPr>
-        <p:style>
-          <a:lnRef idx="1">
-            <a:schemeClr val="accent1"/>
-          </a:lnRef>
-          <a:fillRef idx="3">
-            <a:schemeClr val="accent1"/>
-          </a:fillRef>
-          <a:effectRef idx="2">
-            <a:schemeClr val="accent1"/>
-          </a:effectRef>
-          <a:fontRef idx="minor">
-            <a:schemeClr val="lt1"/>
-          </a:fontRef>
-        </p:style>
-        <p:txBody>
-          <a:bodyPr rtlCol="0" anchor="ctr"/>
-          <a:lstStyle/>
-          <a:p>
-            <a:pPr algn="ctr"/>
-          </a:p>
-        </p:txBody>
-      </p:sp>
-      <p:sp>
-        <p:nvSpPr>
-          <p:cNvPr id="7" name="TextBox 6"/>
-          <p:cNvSpPr txBox="1"/>
-          <p:nvPr/>
-        </p:nvSpPr>
-        <p:spPr>
-          <a:xfrm>
-            <a:off x="1005840" y="5257800"/>
-            <a:ext cx="10149840" cy="822960"/>
-          </a:xfrm>
-          <a:prstGeom prst="rect">
-            <a:avLst/>
-          </a:prstGeom>
-          <a:noFill/>
-        </p:spPr>
-        <p:txBody>
-          <a:bodyPr wrap="square" anchor="ctr">
-            <a:spAutoFit/>
-          </a:bodyPr>
-          <a:lstStyle/>
-          <a:p>
-            <a:pPr algn="ctr"/>
-            <a:r>
-              <a:rPr sz="1500" b="1" i="0">
-                <a:solidFill>
-                  <a:srgbClr val="FFFFFF"/>
-                </a:solidFill>
-                <a:latin typeface="Noto Sans CJK KR"/>
-              </a:rPr>
-              <a:t>최종 성과: Qwen3.5-4B SFT+DPO = 90.0% (RTX 12GB QLoRA, held-out 자동 채점)</a:t>
+              <a:t>19</a:t>
             </a:r>
           </a:p>
         </p:txBody>
@@ -8708,6 +9395,343 @@
                 <a:latin typeface="Noto Sans CJK KR"/>
               </a:rPr>
               <a:t>2</a:t>
+            </a:r>
+          </a:p>
+        </p:txBody>
+      </p:sp>
+    </p:spTree>
+  </p:cSld>
+  <p:clrMapOvr>
+    <a:masterClrMapping/>
+  </p:clrMapOvr>
+</p:sld>
+</file>
+
+<file path=ppt/slides/slide20.xml><?xml version="1.0" encoding="utf-8"?>
+<p:sld xmlns:a="http://schemas.openxmlformats.org/drawingml/2006/main" xmlns:p="http://schemas.openxmlformats.org/presentationml/2006/main" xmlns:r="http://schemas.openxmlformats.org/officeDocument/2006/relationships">
+  <p:cSld>
+    <p:spTree>
+      <p:nvGrpSpPr>
+        <p:cNvPr id="1" name=""/>
+        <p:cNvGrpSpPr/>
+        <p:nvPr/>
+      </p:nvGrpSpPr>
+      <p:grpSpPr/>
+      <p:sp>
+        <p:nvSpPr>
+          <p:cNvPr id="2" name="Rectangle 1"/>
+          <p:cNvSpPr/>
+          <p:nvPr/>
+        </p:nvSpPr>
+        <p:spPr>
+          <a:xfrm>
+            <a:off x="0" y="0"/>
+            <a:ext cx="12191695" cy="6858000"/>
+          </a:xfrm>
+          <a:prstGeom prst="rect">
+            <a:avLst/>
+          </a:prstGeom>
+          <a:solidFill>
+            <a:srgbClr val="1F2D3D"/>
+          </a:solidFill>
+          <a:ln>
+            <a:noFill/>
+          </a:ln>
+          <a:effectLst/>
+        </p:spPr>
+        <p:style>
+          <a:lnRef idx="1">
+            <a:schemeClr val="accent1"/>
+          </a:lnRef>
+          <a:fillRef idx="3">
+            <a:schemeClr val="accent1"/>
+          </a:fillRef>
+          <a:effectRef idx="2">
+            <a:schemeClr val="accent1"/>
+          </a:effectRef>
+          <a:fontRef idx="minor">
+            <a:schemeClr val="lt1"/>
+          </a:fontRef>
+        </p:style>
+        <p:txBody>
+          <a:bodyPr rtlCol="0" anchor="ctr"/>
+          <a:lstStyle/>
+          <a:p>
+            <a:pPr algn="ctr"/>
+          </a:p>
+        </p:txBody>
+      </p:sp>
+      <p:sp>
+        <p:nvSpPr>
+          <p:cNvPr id="3" name="Rectangle 2"/>
+          <p:cNvSpPr/>
+          <p:nvPr/>
+        </p:nvSpPr>
+        <p:spPr>
+          <a:xfrm>
+            <a:off x="0" y="914400"/>
+            <a:ext cx="12191695" cy="38100"/>
+          </a:xfrm>
+          <a:prstGeom prst="rect">
+            <a:avLst/>
+          </a:prstGeom>
+          <a:solidFill>
+            <a:srgbClr val="DD8452"/>
+          </a:solidFill>
+          <a:ln>
+            <a:noFill/>
+          </a:ln>
+          <a:effectLst/>
+        </p:spPr>
+        <p:style>
+          <a:lnRef idx="1">
+            <a:schemeClr val="accent1"/>
+          </a:lnRef>
+          <a:fillRef idx="3">
+            <a:schemeClr val="accent1"/>
+          </a:fillRef>
+          <a:effectRef idx="2">
+            <a:schemeClr val="accent1"/>
+          </a:effectRef>
+          <a:fontRef idx="minor">
+            <a:schemeClr val="lt1"/>
+          </a:fontRef>
+        </p:style>
+        <p:txBody>
+          <a:bodyPr rtlCol="0" anchor="ctr"/>
+          <a:lstStyle/>
+          <a:p>
+            <a:pPr algn="ctr"/>
+          </a:p>
+        </p:txBody>
+      </p:sp>
+      <p:sp>
+        <p:nvSpPr>
+          <p:cNvPr id="4" name="TextBox 3"/>
+          <p:cNvSpPr txBox="1"/>
+          <p:nvPr/>
+        </p:nvSpPr>
+        <p:spPr>
+          <a:xfrm>
+            <a:off x="640080" y="320040"/>
+            <a:ext cx="10972800" cy="640080"/>
+          </a:xfrm>
+          <a:prstGeom prst="rect">
+            <a:avLst/>
+          </a:prstGeom>
+          <a:noFill/>
+        </p:spPr>
+        <p:txBody>
+          <a:bodyPr wrap="square" anchor="t">
+            <a:spAutoFit/>
+          </a:bodyPr>
+          <a:lstStyle/>
+          <a:p>
+            <a:pPr algn="l"/>
+            <a:r>
+              <a:rPr sz="3000" b="1" i="0">
+                <a:solidFill>
+                  <a:srgbClr val="FFFFFF"/>
+                </a:solidFill>
+                <a:latin typeface="Noto Sans CJK KR"/>
+              </a:rPr>
+              <a:t>결론 &amp; 향후 과제</a:t>
+            </a:r>
+          </a:p>
+        </p:txBody>
+      </p:sp>
+      <p:sp>
+        <p:nvSpPr>
+          <p:cNvPr id="5" name="TextBox 4"/>
+          <p:cNvSpPr txBox="1"/>
+          <p:nvPr/>
+        </p:nvSpPr>
+        <p:spPr>
+          <a:xfrm>
+            <a:off x="822960" y="1371600"/>
+            <a:ext cx="10515600" cy="2926080"/>
+          </a:xfrm>
+          <a:prstGeom prst="rect">
+            <a:avLst/>
+          </a:prstGeom>
+          <a:noFill/>
+        </p:spPr>
+        <p:txBody>
+          <a:bodyPr wrap="square" anchor="t">
+            <a:spAutoFit/>
+          </a:bodyPr>
+          <a:lstStyle/>
+          <a:p>
+            <a:pPr algn="l">
+              <a:spcAft>
+                <a:spcPts val="400"/>
+              </a:spcAft>
+            </a:pPr>
+            <a:r>
+              <a:rPr sz="1700" b="1" i="0">
+                <a:solidFill>
+                  <a:srgbClr val="DD8452"/>
+                </a:solidFill>
+                <a:latin typeface="Noto Sans CJK KR"/>
+              </a:rPr>
+              <a:t>•  성능 점프는 데이터 품질·loss 마스킹에서 나왔다</a:t>
+            </a:r>
+          </a:p>
+          <a:p>
+            <a:pPr algn="l" lvl="1">
+              <a:spcAft>
+                <a:spcPts val="1000"/>
+              </a:spcAft>
+            </a:pPr>
+            <a:r>
+              <a:rPr sz="1300" b="0" i="0">
+                <a:solidFill>
+                  <a:srgbClr val="C9D4E0"/>
+                </a:solidFill>
+                <a:latin typeface="Noto Sans CJK KR"/>
+              </a:rPr>
+              <a:t>DPO/GRPO 선호학습 단독으로는 한계 약점을 못 옮김 (+20.6%p는 SFT 데이터 큐레이션)</a:t>
+            </a:r>
+          </a:p>
+          <a:p>
+            <a:pPr algn="l">
+              <a:spcAft>
+                <a:spcPts val="400"/>
+              </a:spcAft>
+            </a:pPr>
+            <a:r>
+              <a:rPr sz="1700" b="1" i="0">
+                <a:solidFill>
+                  <a:srgbClr val="DD8452"/>
+                </a:solidFill>
+                <a:latin typeface="Noto Sans CJK KR"/>
+              </a:rPr>
+              <a:t>•  파인튜닝의 1차 효과는 정확한 JSON 스키마 준수</a:t>
+            </a:r>
+          </a:p>
+          <a:p>
+            <a:pPr algn="l" lvl="1">
+              <a:spcAft>
+                <a:spcPts val="1000"/>
+              </a:spcAft>
+            </a:pPr>
+            <a:r>
+              <a:rPr sz="1300" b="0" i="0">
+                <a:solidFill>
+                  <a:srgbClr val="C9D4E0"/>
+                </a:solidFill>
+                <a:latin typeface="Noto Sans CJK KR"/>
+              </a:rPr>
+              <a:t>instruct 0% → SFT 90%: 추론이 아닌 출력 규격 고정이 핵심</a:t>
+            </a:r>
+          </a:p>
+          <a:p>
+            <a:pPr algn="l">
+              <a:spcAft>
+                <a:spcPts val="400"/>
+              </a:spcAft>
+            </a:pPr>
+            <a:r>
+              <a:rPr sz="1700" b="1" i="0">
+                <a:solidFill>
+                  <a:srgbClr val="DD8452"/>
+                </a:solidFill>
+                <a:latin typeface="Noto Sans CJK KR"/>
+              </a:rPr>
+              <a:t>•  의존성 체인은 미해결 — SFT 데이터 증량이 다음 레버</a:t>
+            </a:r>
+          </a:p>
+          <a:p>
+            <a:pPr algn="l" lvl="1"/>
+            <a:r>
+              <a:rPr sz="1300" b="0" i="0">
+                <a:solidFill>
+                  <a:srgbClr val="C9D4E0"/>
+                </a:solidFill>
+                <a:latin typeface="Noto Sans CJK KR"/>
+              </a:rPr>
+              <a:t>4–5단계 긴 체인 특화 데이터 3× 증량으로 능력 자체를 보강해야</a:t>
+            </a:r>
+          </a:p>
+        </p:txBody>
+      </p:sp>
+      <p:sp>
+        <p:nvSpPr>
+          <p:cNvPr id="6" name="Rectangle 5"/>
+          <p:cNvSpPr/>
+          <p:nvPr/>
+        </p:nvSpPr>
+        <p:spPr>
+          <a:xfrm>
+            <a:off x="822960" y="5120640"/>
+            <a:ext cx="10515600" cy="1005840"/>
+          </a:xfrm>
+          <a:prstGeom prst="rect">
+            <a:avLst/>
+          </a:prstGeom>
+          <a:solidFill>
+            <a:srgbClr val="2A3B4F"/>
+          </a:solidFill>
+          <a:ln w="12700">
+            <a:solidFill>
+              <a:srgbClr val="DD8452"/>
+            </a:solidFill>
+          </a:ln>
+          <a:effectLst/>
+        </p:spPr>
+        <p:style>
+          <a:lnRef idx="1">
+            <a:schemeClr val="accent1"/>
+          </a:lnRef>
+          <a:fillRef idx="3">
+            <a:schemeClr val="accent1"/>
+          </a:fillRef>
+          <a:effectRef idx="2">
+            <a:schemeClr val="accent1"/>
+          </a:effectRef>
+          <a:fontRef idx="minor">
+            <a:schemeClr val="lt1"/>
+          </a:fontRef>
+        </p:style>
+        <p:txBody>
+          <a:bodyPr rtlCol="0" anchor="ctr"/>
+          <a:lstStyle/>
+          <a:p>
+            <a:pPr algn="ctr"/>
+          </a:p>
+        </p:txBody>
+      </p:sp>
+      <p:sp>
+        <p:nvSpPr>
+          <p:cNvPr id="7" name="TextBox 6"/>
+          <p:cNvSpPr txBox="1"/>
+          <p:nvPr/>
+        </p:nvSpPr>
+        <p:spPr>
+          <a:xfrm>
+            <a:off x="1005840" y="5257800"/>
+            <a:ext cx="10149840" cy="822960"/>
+          </a:xfrm>
+          <a:prstGeom prst="rect">
+            <a:avLst/>
+          </a:prstGeom>
+          <a:noFill/>
+        </p:spPr>
+        <p:txBody>
+          <a:bodyPr wrap="square" anchor="ctr">
+            <a:spAutoFit/>
+          </a:bodyPr>
+          <a:lstStyle/>
+          <a:p>
+            <a:pPr algn="ctr"/>
+            <a:r>
+              <a:rPr sz="1500" b="1" i="0">
+                <a:solidFill>
+                  <a:srgbClr val="FFFFFF"/>
+                </a:solidFill>
+                <a:latin typeface="Noto Sans CJK KR"/>
+              </a:rPr>
+              <a:t>최종 성과: Qwen3.5-4B SFT+DPO = 90.0% (RTX 12GB QLoRA, held-out 자동 채점)</a:t>
             </a:r>
           </a:p>
         </p:txBody>

--- a/presentation/TimeSorter_발표자료.pptx
+++ b/presentation/TimeSorter_발표자료.pptx
@@ -4391,7 +4391,7 @@
                 </a:solidFill>
                 <a:latin typeface="Noto Sans CJK KR"/>
               </a:rPr>
-              <a:t>9B(2.3× 크기, RTX 4090, n=150)은 리스크 80→95% 등 약점을 평준화하나, 의존성 체인은 57%로 여전히 최대 약점</a:t>
+              <a:t>동일 표본(n=150): 4B 85.3% vs 9B 88.7% (+3.4%p) — 9B는 당일시각·체인에서 앞섬</a:t>
             </a:r>
           </a:p>
           <a:p>
@@ -4407,7 +4407,7 @@
                 </a:solidFill>
                 <a:latin typeface="Noto Sans CJK KR"/>
               </a:rPr>
-              <a:t>→ 체인은 모델 크기가 아니라 SFT 데이터 보강이 필요한 문제 (4B n=30·9B n=150, 표본차 감안)</a:t>
+              <a:t>→ 체인은 4B 47%·9B 57%로 둘 다 미해결 — 모델 크기가 아니라 SFT 데이터 보강 문제</a:t>
             </a:r>
           </a:p>
         </p:txBody>
@@ -5609,7 +5609,7 @@
                           </a:solidFill>
                           <a:latin typeface="Noto Sans CJK KR"/>
                         </a:rPr>
-                        <a:t>검증 통과율</a:t>
+                        <a:t>검증(n=150)</a:t>
                       </a:r>
                     </a:p>
                   </a:txBody>
@@ -5632,7 +5632,7 @@
                           </a:solidFill>
                           <a:latin typeface="Noto Sans CJK KR"/>
                         </a:rPr>
-                        <a:t>90.0%</a:t>
+                        <a:t>85.3%</a:t>
                       </a:r>
                     </a:p>
                   </a:txBody>
